--- a/Report/E-Book.pptx
+++ b/Report/E-Book.pptx
@@ -818,7 +818,7 @@
               </a:spcAft>
               <a:buNone/>
             </a:pPr>
-            <a:endParaRPr/>
+            <a:endParaRPr dirty="0"/>
           </a:p>
         </p:txBody>
       </p:sp>
@@ -922,7 +922,7 @@
               </a:spcAft>
               <a:buNone/>
             </a:pPr>
-            <a:endParaRPr/>
+            <a:endParaRPr dirty="0"/>
           </a:p>
         </p:txBody>
       </p:sp>
@@ -1031,7 +1031,7 @@
               </a:spcAft>
               <a:buNone/>
             </a:pPr>
-            <a:endParaRPr/>
+            <a:endParaRPr dirty="0"/>
           </a:p>
         </p:txBody>
       </p:sp>
@@ -1140,7 +1140,7 @@
               </a:spcAft>
               <a:buNone/>
             </a:pPr>
-            <a:endParaRPr/>
+            <a:endParaRPr dirty="0"/>
           </a:p>
         </p:txBody>
       </p:sp>
@@ -1249,7 +1249,7 @@
               </a:spcAft>
               <a:buNone/>
             </a:pPr>
-            <a:endParaRPr/>
+            <a:endParaRPr dirty="0"/>
           </a:p>
         </p:txBody>
       </p:sp>
@@ -1358,7 +1358,7 @@
               </a:spcAft>
               <a:buNone/>
             </a:pPr>
-            <a:endParaRPr/>
+            <a:endParaRPr dirty="0"/>
           </a:p>
         </p:txBody>
       </p:sp>
@@ -1828,7 +1828,7 @@
               </a:spcAft>
               <a:buNone/>
             </a:pPr>
-            <a:endParaRPr/>
+            <a:endParaRPr dirty="0"/>
           </a:p>
         </p:txBody>
       </p:sp>
@@ -1953,7 +1953,7 @@
                   </a:spcAft>
                   <a:buNone/>
                 </a:pPr>
-                <a:endParaRPr/>
+                <a:endParaRPr dirty="0"/>
               </a:p>
             </p:txBody>
           </p:sp>
@@ -2017,7 +2017,7 @@
                   </a:spcAft>
                   <a:buNone/>
                 </a:pPr>
-                <a:endParaRPr/>
+                <a:endParaRPr dirty="0"/>
               </a:p>
             </p:txBody>
           </p:sp>
@@ -2081,7 +2081,7 @@
                   </a:spcAft>
                   <a:buNone/>
                 </a:pPr>
-                <a:endParaRPr/>
+                <a:endParaRPr dirty="0"/>
               </a:p>
             </p:txBody>
           </p:sp>
@@ -2151,7 +2151,7 @@
                   </a:spcAft>
                   <a:buNone/>
                 </a:pPr>
-                <a:endParaRPr/>
+                <a:endParaRPr dirty="0"/>
               </a:p>
             </p:txBody>
           </p:sp>
@@ -2191,7 +2191,7 @@
                   </a:spcAft>
                   <a:buNone/>
                 </a:pPr>
-                <a:endParaRPr/>
+                <a:endParaRPr dirty="0"/>
               </a:p>
             </p:txBody>
           </p:sp>
@@ -2231,7 +2231,7 @@
                   </a:spcAft>
                   <a:buNone/>
                 </a:pPr>
-                <a:endParaRPr/>
+                <a:endParaRPr dirty="0"/>
               </a:p>
             </p:txBody>
           </p:sp>
@@ -2271,7 +2271,7 @@
                   </a:spcAft>
                   <a:buNone/>
                 </a:pPr>
-                <a:endParaRPr/>
+                <a:endParaRPr dirty="0"/>
               </a:p>
             </p:txBody>
           </p:sp>
@@ -2311,7 +2311,7 @@
                   </a:spcAft>
                   <a:buNone/>
                 </a:pPr>
-                <a:endParaRPr/>
+                <a:endParaRPr dirty="0"/>
               </a:p>
             </p:txBody>
           </p:sp>
@@ -2352,7 +2352,7 @@
                 </a:spcAft>
                 <a:buNone/>
               </a:pPr>
-              <a:endParaRPr/>
+              <a:endParaRPr dirty="0"/>
             </a:p>
           </p:txBody>
         </p:sp>
@@ -2779,7 +2779,7 @@
                 </a:spcAft>
                 <a:buNone/>
               </a:pPr>
-              <a:endParaRPr/>
+              <a:endParaRPr dirty="0"/>
             </a:p>
           </p:txBody>
         </p:sp>
@@ -2843,7 +2843,7 @@
                 </a:spcAft>
                 <a:buNone/>
               </a:pPr>
-              <a:endParaRPr/>
+              <a:endParaRPr dirty="0"/>
             </a:p>
           </p:txBody>
         </p:sp>
@@ -2907,7 +2907,7 @@
                 </a:spcAft>
                 <a:buNone/>
               </a:pPr>
-              <a:endParaRPr/>
+              <a:endParaRPr dirty="0"/>
             </a:p>
           </p:txBody>
         </p:sp>
@@ -2971,7 +2971,7 @@
                 </a:spcAft>
                 <a:buNone/>
               </a:pPr>
-              <a:endParaRPr/>
+              <a:endParaRPr dirty="0"/>
             </a:p>
           </p:txBody>
         </p:sp>
@@ -3041,7 +3041,7 @@
                 </a:spcAft>
                 <a:buNone/>
               </a:pPr>
-              <a:endParaRPr/>
+              <a:endParaRPr dirty="0"/>
             </a:p>
           </p:txBody>
         </p:sp>
@@ -3105,7 +3105,7 @@
                 </a:spcAft>
                 <a:buNone/>
               </a:pPr>
-              <a:endParaRPr/>
+              <a:endParaRPr dirty="0"/>
             </a:p>
           </p:txBody>
         </p:sp>
@@ -3169,7 +3169,7 @@
                 </a:spcAft>
                 <a:buNone/>
               </a:pPr>
-              <a:endParaRPr/>
+              <a:endParaRPr dirty="0"/>
             </a:p>
           </p:txBody>
         </p:sp>
@@ -3233,7 +3233,7 @@
                 </a:spcAft>
                 <a:buNone/>
               </a:pPr>
-              <a:endParaRPr/>
+              <a:endParaRPr dirty="0"/>
             </a:p>
           </p:txBody>
         </p:sp>
@@ -3303,7 +3303,7 @@
                 </a:spcAft>
                 <a:buNone/>
               </a:pPr>
-              <a:endParaRPr/>
+              <a:endParaRPr dirty="0"/>
             </a:p>
           </p:txBody>
         </p:sp>
@@ -3357,7 +3357,7 @@
                   </a:spcAft>
                   <a:buNone/>
                 </a:pPr>
-                <a:endParaRPr/>
+                <a:endParaRPr dirty="0"/>
               </a:p>
             </p:txBody>
           </p:sp>
@@ -3397,7 +3397,7 @@
                   </a:spcAft>
                   <a:buNone/>
                 </a:pPr>
-                <a:endParaRPr/>
+                <a:endParaRPr dirty="0"/>
               </a:p>
             </p:txBody>
           </p:sp>
@@ -3437,7 +3437,7 @@
                   </a:spcAft>
                   <a:buNone/>
                 </a:pPr>
-                <a:endParaRPr/>
+                <a:endParaRPr dirty="0"/>
               </a:p>
             </p:txBody>
           </p:sp>
@@ -3477,7 +3477,7 @@
                   </a:spcAft>
                   <a:buNone/>
                 </a:pPr>
-                <a:endParaRPr/>
+                <a:endParaRPr dirty="0"/>
               </a:p>
             </p:txBody>
           </p:sp>
@@ -3974,7 +3974,7 @@
                 </a:spcAft>
                 <a:buNone/>
               </a:pPr>
-              <a:endParaRPr/>
+              <a:endParaRPr dirty="0"/>
             </a:p>
           </p:txBody>
         </p:sp>
@@ -4038,7 +4038,7 @@
                 </a:spcAft>
                 <a:buNone/>
               </a:pPr>
-              <a:endParaRPr/>
+              <a:endParaRPr dirty="0"/>
             </a:p>
           </p:txBody>
         </p:sp>
@@ -4102,7 +4102,7 @@
                 </a:spcAft>
                 <a:buNone/>
               </a:pPr>
-              <a:endParaRPr/>
+              <a:endParaRPr dirty="0"/>
             </a:p>
           </p:txBody>
         </p:sp>
@@ -4172,7 +4172,7 @@
                 </a:spcAft>
                 <a:buNone/>
               </a:pPr>
-              <a:endParaRPr/>
+              <a:endParaRPr dirty="0"/>
             </a:p>
           </p:txBody>
         </p:sp>
@@ -4236,7 +4236,7 @@
                 </a:spcAft>
                 <a:buNone/>
               </a:pPr>
-              <a:endParaRPr/>
+              <a:endParaRPr dirty="0"/>
             </a:p>
           </p:txBody>
         </p:sp>
@@ -4300,7 +4300,7 @@
                 </a:spcAft>
                 <a:buNone/>
               </a:pPr>
-              <a:endParaRPr/>
+              <a:endParaRPr dirty="0"/>
             </a:p>
           </p:txBody>
         </p:sp>
@@ -4364,7 +4364,7 @@
                 </a:spcAft>
                 <a:buNone/>
               </a:pPr>
-              <a:endParaRPr/>
+              <a:endParaRPr dirty="0"/>
             </a:p>
           </p:txBody>
         </p:sp>
@@ -4434,7 +4434,7 @@
                 </a:spcAft>
                 <a:buNone/>
               </a:pPr>
-              <a:endParaRPr/>
+              <a:endParaRPr dirty="0"/>
             </a:p>
           </p:txBody>
         </p:sp>
@@ -4474,7 +4474,7 @@
                 </a:spcAft>
                 <a:buNone/>
               </a:pPr>
-              <a:endParaRPr/>
+              <a:endParaRPr dirty="0"/>
             </a:p>
           </p:txBody>
         </p:sp>
@@ -4514,7 +4514,7 @@
                 </a:spcAft>
                 <a:buNone/>
               </a:pPr>
-              <a:endParaRPr/>
+              <a:endParaRPr dirty="0"/>
             </a:p>
           </p:txBody>
         </p:sp>
@@ -4554,7 +4554,7 @@
                 </a:spcAft>
                 <a:buNone/>
               </a:pPr>
-              <a:endParaRPr/>
+              <a:endParaRPr dirty="0"/>
             </a:p>
           </p:txBody>
         </p:sp>
@@ -4594,7 +4594,7 @@
                 </a:spcAft>
                 <a:buNone/>
               </a:pPr>
-              <a:endParaRPr/>
+              <a:endParaRPr dirty="0"/>
             </a:p>
           </p:txBody>
         </p:sp>
@@ -4634,7 +4634,7 @@
                 </a:spcAft>
                 <a:buNone/>
               </a:pPr>
-              <a:endParaRPr/>
+              <a:endParaRPr dirty="0"/>
             </a:p>
           </p:txBody>
         </p:sp>
@@ -4674,7 +4674,7 @@
                 </a:spcAft>
                 <a:buNone/>
               </a:pPr>
-              <a:endParaRPr/>
+              <a:endParaRPr dirty="0"/>
             </a:p>
           </p:txBody>
         </p:sp>
@@ -7115,7 +7115,7 @@
                 </a:spcAft>
                 <a:buNone/>
               </a:pPr>
-              <a:endParaRPr/>
+              <a:endParaRPr dirty="0"/>
             </a:p>
           </p:txBody>
         </p:sp>
@@ -7179,7 +7179,7 @@
                 </a:spcAft>
                 <a:buNone/>
               </a:pPr>
-              <a:endParaRPr/>
+              <a:endParaRPr dirty="0"/>
             </a:p>
           </p:txBody>
         </p:sp>
@@ -7243,7 +7243,7 @@
                 </a:spcAft>
                 <a:buNone/>
               </a:pPr>
-              <a:endParaRPr/>
+              <a:endParaRPr dirty="0"/>
             </a:p>
           </p:txBody>
         </p:sp>
@@ -7313,7 +7313,7 @@
                 </a:spcAft>
                 <a:buNone/>
               </a:pPr>
-              <a:endParaRPr/>
+              <a:endParaRPr dirty="0"/>
             </a:p>
           </p:txBody>
         </p:sp>
@@ -7377,7 +7377,7 @@
                 </a:spcAft>
                 <a:buNone/>
               </a:pPr>
-              <a:endParaRPr/>
+              <a:endParaRPr dirty="0"/>
             </a:p>
           </p:txBody>
         </p:sp>
@@ -7441,7 +7441,7 @@
                 </a:spcAft>
                 <a:buNone/>
               </a:pPr>
-              <a:endParaRPr/>
+              <a:endParaRPr dirty="0"/>
             </a:p>
           </p:txBody>
         </p:sp>
@@ -7505,7 +7505,7 @@
                 </a:spcAft>
                 <a:buNone/>
               </a:pPr>
-              <a:endParaRPr/>
+              <a:endParaRPr dirty="0"/>
             </a:p>
           </p:txBody>
         </p:sp>
@@ -7575,7 +7575,7 @@
                 </a:spcAft>
                 <a:buNone/>
               </a:pPr>
-              <a:endParaRPr/>
+              <a:endParaRPr dirty="0"/>
             </a:p>
           </p:txBody>
         </p:sp>
@@ -7629,7 +7629,7 @@
                   </a:spcAft>
                   <a:buNone/>
                 </a:pPr>
-                <a:endParaRPr/>
+                <a:endParaRPr dirty="0"/>
               </a:p>
             </p:txBody>
           </p:sp>
@@ -7669,7 +7669,7 @@
                   </a:spcAft>
                   <a:buNone/>
                 </a:pPr>
-                <a:endParaRPr/>
+                <a:endParaRPr dirty="0"/>
               </a:p>
             </p:txBody>
           </p:sp>
@@ -7709,7 +7709,7 @@
                   </a:spcAft>
                   <a:buNone/>
                 </a:pPr>
-                <a:endParaRPr/>
+                <a:endParaRPr dirty="0"/>
               </a:p>
             </p:txBody>
           </p:sp>
@@ -7749,7 +7749,7 @@
                   </a:spcAft>
                   <a:buNone/>
                 </a:pPr>
-                <a:endParaRPr/>
+                <a:endParaRPr dirty="0"/>
               </a:p>
             </p:txBody>
           </p:sp>
@@ -8056,7 +8056,7 @@
                 </a:spcAft>
                 <a:buNone/>
               </a:pPr>
-              <a:endParaRPr/>
+              <a:endParaRPr dirty="0"/>
             </a:p>
           </p:txBody>
         </p:sp>
@@ -8120,7 +8120,7 @@
                 </a:spcAft>
                 <a:buNone/>
               </a:pPr>
-              <a:endParaRPr/>
+              <a:endParaRPr dirty="0"/>
             </a:p>
           </p:txBody>
         </p:sp>
@@ -8184,7 +8184,7 @@
                 </a:spcAft>
                 <a:buNone/>
               </a:pPr>
-              <a:endParaRPr/>
+              <a:endParaRPr dirty="0"/>
             </a:p>
           </p:txBody>
         </p:sp>
@@ -8254,7 +8254,7 @@
                 </a:spcAft>
                 <a:buNone/>
               </a:pPr>
-              <a:endParaRPr/>
+              <a:endParaRPr dirty="0"/>
             </a:p>
           </p:txBody>
         </p:sp>
@@ -8318,7 +8318,7 @@
                 </a:spcAft>
                 <a:buNone/>
               </a:pPr>
-              <a:endParaRPr/>
+              <a:endParaRPr dirty="0"/>
             </a:p>
           </p:txBody>
         </p:sp>
@@ -8382,7 +8382,7 @@
                 </a:spcAft>
                 <a:buNone/>
               </a:pPr>
-              <a:endParaRPr/>
+              <a:endParaRPr dirty="0"/>
             </a:p>
           </p:txBody>
         </p:sp>
@@ -8446,7 +8446,7 @@
                 </a:spcAft>
                 <a:buNone/>
               </a:pPr>
-              <a:endParaRPr/>
+              <a:endParaRPr dirty="0"/>
             </a:p>
           </p:txBody>
         </p:sp>
@@ -8516,7 +8516,7 @@
                 </a:spcAft>
                 <a:buNone/>
               </a:pPr>
-              <a:endParaRPr/>
+              <a:endParaRPr dirty="0"/>
             </a:p>
           </p:txBody>
         </p:sp>
@@ -8570,7 +8570,7 @@
                   </a:spcAft>
                   <a:buNone/>
                 </a:pPr>
-                <a:endParaRPr/>
+                <a:endParaRPr dirty="0"/>
               </a:p>
             </p:txBody>
           </p:sp>
@@ -8610,7 +8610,7 @@
                   </a:spcAft>
                   <a:buNone/>
                 </a:pPr>
-                <a:endParaRPr/>
+                <a:endParaRPr dirty="0"/>
               </a:p>
             </p:txBody>
           </p:sp>
@@ -8650,7 +8650,7 @@
                   </a:spcAft>
                   <a:buNone/>
                 </a:pPr>
-                <a:endParaRPr/>
+                <a:endParaRPr dirty="0"/>
               </a:p>
             </p:txBody>
           </p:sp>
@@ -8690,7 +8690,7 @@
                   </a:spcAft>
                   <a:buNone/>
                 </a:pPr>
-                <a:endParaRPr/>
+                <a:endParaRPr dirty="0"/>
               </a:p>
             </p:txBody>
           </p:sp>
@@ -8995,7 +8995,7 @@
                 </a:spcAft>
                 <a:buNone/>
               </a:pPr>
-              <a:endParaRPr/>
+              <a:endParaRPr dirty="0"/>
             </a:p>
           </p:txBody>
         </p:sp>
@@ -9059,7 +9059,7 @@
                 </a:spcAft>
                 <a:buNone/>
               </a:pPr>
-              <a:endParaRPr/>
+              <a:endParaRPr dirty="0"/>
             </a:p>
           </p:txBody>
         </p:sp>
@@ -9123,7 +9123,7 @@
                 </a:spcAft>
                 <a:buNone/>
               </a:pPr>
-              <a:endParaRPr/>
+              <a:endParaRPr dirty="0"/>
             </a:p>
           </p:txBody>
         </p:sp>
@@ -9193,7 +9193,7 @@
                 </a:spcAft>
                 <a:buNone/>
               </a:pPr>
-              <a:endParaRPr/>
+              <a:endParaRPr dirty="0"/>
             </a:p>
           </p:txBody>
         </p:sp>
@@ -9233,7 +9233,7 @@
                 </a:spcAft>
                 <a:buNone/>
               </a:pPr>
-              <a:endParaRPr/>
+              <a:endParaRPr dirty="0"/>
             </a:p>
           </p:txBody>
         </p:sp>
@@ -9273,7 +9273,7 @@
                 </a:spcAft>
                 <a:buNone/>
               </a:pPr>
-              <a:endParaRPr/>
+              <a:endParaRPr dirty="0"/>
             </a:p>
           </p:txBody>
         </p:sp>
@@ -9313,7 +9313,7 @@
                 </a:spcAft>
                 <a:buNone/>
               </a:pPr>
-              <a:endParaRPr/>
+              <a:endParaRPr dirty="0"/>
             </a:p>
           </p:txBody>
         </p:sp>
@@ -9353,7 +9353,7 @@
                 </a:spcAft>
                 <a:buNone/>
               </a:pPr>
-              <a:endParaRPr/>
+              <a:endParaRPr dirty="0"/>
             </a:p>
           </p:txBody>
         </p:sp>
@@ -9394,7 +9394,7 @@
               </a:spcAft>
               <a:buNone/>
             </a:pPr>
-            <a:endParaRPr/>
+            <a:endParaRPr dirty="0"/>
           </a:p>
         </p:txBody>
       </p:sp>
@@ -11865,7 +11865,7 @@
                 </a:spcAft>
                 <a:buNone/>
               </a:pPr>
-              <a:endParaRPr/>
+              <a:endParaRPr dirty="0"/>
             </a:p>
           </p:txBody>
         </p:sp>
@@ -11929,7 +11929,7 @@
                 </a:spcAft>
                 <a:buNone/>
               </a:pPr>
-              <a:endParaRPr/>
+              <a:endParaRPr dirty="0"/>
             </a:p>
           </p:txBody>
         </p:sp>
@@ -11993,7 +11993,7 @@
                 </a:spcAft>
                 <a:buNone/>
               </a:pPr>
-              <a:endParaRPr/>
+              <a:endParaRPr dirty="0"/>
             </a:p>
           </p:txBody>
         </p:sp>
@@ -12057,7 +12057,7 @@
                 </a:spcAft>
                 <a:buNone/>
               </a:pPr>
-              <a:endParaRPr/>
+              <a:endParaRPr dirty="0"/>
             </a:p>
           </p:txBody>
         </p:sp>
@@ -12127,7 +12127,7 @@
                 </a:spcAft>
                 <a:buNone/>
               </a:pPr>
-              <a:endParaRPr/>
+              <a:endParaRPr dirty="0"/>
             </a:p>
           </p:txBody>
         </p:sp>
@@ -12191,7 +12191,7 @@
                 </a:spcAft>
                 <a:buNone/>
               </a:pPr>
-              <a:endParaRPr/>
+              <a:endParaRPr dirty="0"/>
             </a:p>
           </p:txBody>
         </p:sp>
@@ -12255,7 +12255,7 @@
                 </a:spcAft>
                 <a:buNone/>
               </a:pPr>
-              <a:endParaRPr/>
+              <a:endParaRPr dirty="0"/>
             </a:p>
           </p:txBody>
         </p:sp>
@@ -12319,7 +12319,7 @@
                 </a:spcAft>
                 <a:buNone/>
               </a:pPr>
-              <a:endParaRPr/>
+              <a:endParaRPr dirty="0"/>
             </a:p>
           </p:txBody>
         </p:sp>
@@ -12389,7 +12389,7 @@
                 </a:spcAft>
                 <a:buNone/>
               </a:pPr>
-              <a:endParaRPr/>
+              <a:endParaRPr dirty="0"/>
             </a:p>
           </p:txBody>
         </p:sp>
@@ -12443,7 +12443,7 @@
                   </a:spcAft>
                   <a:buNone/>
                 </a:pPr>
-                <a:endParaRPr/>
+                <a:endParaRPr dirty="0"/>
               </a:p>
             </p:txBody>
           </p:sp>
@@ -12483,7 +12483,7 @@
                   </a:spcAft>
                   <a:buNone/>
                 </a:pPr>
-                <a:endParaRPr/>
+                <a:endParaRPr dirty="0"/>
               </a:p>
             </p:txBody>
           </p:sp>
@@ -12523,7 +12523,7 @@
                   </a:spcAft>
                   <a:buNone/>
                 </a:pPr>
-                <a:endParaRPr/>
+                <a:endParaRPr dirty="0"/>
               </a:p>
             </p:txBody>
           </p:sp>
@@ -12563,7 +12563,7 @@
                   </a:spcAft>
                   <a:buNone/>
                 </a:pPr>
-                <a:endParaRPr/>
+                <a:endParaRPr dirty="0"/>
               </a:p>
             </p:txBody>
           </p:sp>
@@ -12868,7 +12868,7 @@
                 </a:spcAft>
                 <a:buNone/>
               </a:pPr>
-              <a:endParaRPr/>
+              <a:endParaRPr dirty="0"/>
             </a:p>
           </p:txBody>
         </p:sp>
@@ -12932,7 +12932,7 @@
                 </a:spcAft>
                 <a:buNone/>
               </a:pPr>
-              <a:endParaRPr/>
+              <a:endParaRPr dirty="0"/>
             </a:p>
           </p:txBody>
         </p:sp>
@@ -12996,7 +12996,7 @@
                 </a:spcAft>
                 <a:buNone/>
               </a:pPr>
-              <a:endParaRPr/>
+              <a:endParaRPr dirty="0"/>
             </a:p>
           </p:txBody>
         </p:sp>
@@ -13066,7 +13066,7 @@
                 </a:spcAft>
                 <a:buNone/>
               </a:pPr>
-              <a:endParaRPr/>
+              <a:endParaRPr dirty="0"/>
             </a:p>
           </p:txBody>
         </p:sp>
@@ -13106,7 +13106,7 @@
                 </a:spcAft>
                 <a:buNone/>
               </a:pPr>
-              <a:endParaRPr/>
+              <a:endParaRPr dirty="0"/>
             </a:p>
           </p:txBody>
         </p:sp>
@@ -13146,7 +13146,7 @@
                 </a:spcAft>
                 <a:buNone/>
               </a:pPr>
-              <a:endParaRPr/>
+              <a:endParaRPr dirty="0"/>
             </a:p>
           </p:txBody>
         </p:sp>
@@ -13186,7 +13186,7 @@
                 </a:spcAft>
                 <a:buNone/>
               </a:pPr>
-              <a:endParaRPr/>
+              <a:endParaRPr dirty="0"/>
             </a:p>
           </p:txBody>
         </p:sp>
@@ -13226,7 +13226,7 @@
                 </a:spcAft>
                 <a:buNone/>
               </a:pPr>
-              <a:endParaRPr/>
+              <a:endParaRPr dirty="0"/>
             </a:p>
           </p:txBody>
         </p:sp>
@@ -13266,7 +13266,7 @@
                 </a:spcAft>
                 <a:buNone/>
               </a:pPr>
-              <a:endParaRPr/>
+              <a:endParaRPr dirty="0"/>
             </a:p>
           </p:txBody>
         </p:sp>
@@ -14891,7 +14891,7 @@
               </a:spcAft>
               <a:buNone/>
             </a:pPr>
-            <a:endParaRPr/>
+            <a:endParaRPr dirty="0"/>
           </a:p>
         </p:txBody>
       </p:sp>
@@ -15002,7 +15002,7 @@
                 </a:spcAft>
                 <a:buNone/>
               </a:pPr>
-              <a:endParaRPr/>
+              <a:endParaRPr dirty="0"/>
             </a:p>
           </p:txBody>
         </p:sp>
@@ -15066,7 +15066,7 @@
                 </a:spcAft>
                 <a:buNone/>
               </a:pPr>
-              <a:endParaRPr/>
+              <a:endParaRPr dirty="0"/>
             </a:p>
           </p:txBody>
         </p:sp>
@@ -15130,7 +15130,7 @@
                 </a:spcAft>
                 <a:buNone/>
               </a:pPr>
-              <a:endParaRPr/>
+              <a:endParaRPr dirty="0"/>
             </a:p>
           </p:txBody>
         </p:sp>
@@ -15200,7 +15200,7 @@
                 </a:spcAft>
                 <a:buNone/>
               </a:pPr>
-              <a:endParaRPr/>
+              <a:endParaRPr dirty="0"/>
             </a:p>
           </p:txBody>
         </p:sp>
@@ -15240,7 +15240,7 @@
                 </a:spcAft>
                 <a:buNone/>
               </a:pPr>
-              <a:endParaRPr/>
+              <a:endParaRPr dirty="0"/>
             </a:p>
           </p:txBody>
         </p:sp>
@@ -15280,7 +15280,7 @@
                 </a:spcAft>
                 <a:buNone/>
               </a:pPr>
-              <a:endParaRPr/>
+              <a:endParaRPr dirty="0"/>
             </a:p>
           </p:txBody>
         </p:sp>
@@ -15320,7 +15320,7 @@
                 </a:spcAft>
                 <a:buNone/>
               </a:pPr>
-              <a:endParaRPr/>
+              <a:endParaRPr dirty="0"/>
             </a:p>
           </p:txBody>
         </p:sp>
@@ -15360,7 +15360,7 @@
                 </a:spcAft>
                 <a:buNone/>
               </a:pPr>
-              <a:endParaRPr/>
+              <a:endParaRPr dirty="0"/>
             </a:p>
           </p:txBody>
         </p:sp>
@@ -15401,7 +15401,7 @@
               </a:spcAft>
               <a:buNone/>
             </a:pPr>
-            <a:endParaRPr/>
+            <a:endParaRPr dirty="0"/>
           </a:p>
         </p:txBody>
       </p:sp>
@@ -15996,7 +15996,7 @@
                 </a:spcAft>
                 <a:buNone/>
               </a:pPr>
-              <a:endParaRPr/>
+              <a:endParaRPr dirty="0"/>
             </a:p>
           </p:txBody>
         </p:sp>
@@ -16060,7 +16060,7 @@
                 </a:spcAft>
                 <a:buNone/>
               </a:pPr>
-              <a:endParaRPr/>
+              <a:endParaRPr dirty="0"/>
             </a:p>
           </p:txBody>
         </p:sp>
@@ -16124,7 +16124,7 @@
                 </a:spcAft>
                 <a:buNone/>
               </a:pPr>
-              <a:endParaRPr/>
+              <a:endParaRPr dirty="0"/>
             </a:p>
           </p:txBody>
         </p:sp>
@@ -16194,7 +16194,7 @@
                 </a:spcAft>
                 <a:buNone/>
               </a:pPr>
-              <a:endParaRPr/>
+              <a:endParaRPr dirty="0"/>
             </a:p>
           </p:txBody>
         </p:sp>
@@ -16258,7 +16258,7 @@
                 </a:spcAft>
                 <a:buNone/>
               </a:pPr>
-              <a:endParaRPr/>
+              <a:endParaRPr dirty="0"/>
             </a:p>
           </p:txBody>
         </p:sp>
@@ -16322,7 +16322,7 @@
                 </a:spcAft>
                 <a:buNone/>
               </a:pPr>
-              <a:endParaRPr/>
+              <a:endParaRPr dirty="0"/>
             </a:p>
           </p:txBody>
         </p:sp>
@@ -16386,7 +16386,7 @@
                 </a:spcAft>
                 <a:buNone/>
               </a:pPr>
-              <a:endParaRPr/>
+              <a:endParaRPr dirty="0"/>
             </a:p>
           </p:txBody>
         </p:sp>
@@ -16456,7 +16456,7 @@
                 </a:spcAft>
                 <a:buNone/>
               </a:pPr>
-              <a:endParaRPr/>
+              <a:endParaRPr dirty="0"/>
             </a:p>
           </p:txBody>
         </p:sp>
@@ -16496,7 +16496,7 @@
                 </a:spcAft>
                 <a:buNone/>
               </a:pPr>
-              <a:endParaRPr/>
+              <a:endParaRPr dirty="0"/>
             </a:p>
           </p:txBody>
         </p:sp>
@@ -16536,7 +16536,7 @@
                 </a:spcAft>
                 <a:buNone/>
               </a:pPr>
-              <a:endParaRPr/>
+              <a:endParaRPr dirty="0"/>
             </a:p>
           </p:txBody>
         </p:sp>
@@ -16576,7 +16576,7 @@
                 </a:spcAft>
                 <a:buNone/>
               </a:pPr>
-              <a:endParaRPr/>
+              <a:endParaRPr dirty="0"/>
             </a:p>
           </p:txBody>
         </p:sp>
@@ -16616,7 +16616,7 @@
                 </a:spcAft>
                 <a:buNone/>
               </a:pPr>
-              <a:endParaRPr/>
+              <a:endParaRPr dirty="0"/>
             </a:p>
           </p:txBody>
         </p:sp>
@@ -16656,7 +16656,7 @@
                 </a:spcAft>
                 <a:buNone/>
               </a:pPr>
-              <a:endParaRPr/>
+              <a:endParaRPr dirty="0"/>
             </a:p>
           </p:txBody>
         </p:sp>
@@ -16696,7 +16696,7 @@
                 </a:spcAft>
                 <a:buNone/>
               </a:pPr>
-              <a:endParaRPr/>
+              <a:endParaRPr dirty="0"/>
             </a:p>
           </p:txBody>
         </p:sp>
@@ -17195,7 +17195,7 @@
               </a:spcAft>
               <a:buNone/>
             </a:pPr>
-            <a:endParaRPr/>
+            <a:endParaRPr dirty="0"/>
           </a:p>
         </p:txBody>
       </p:sp>
@@ -17306,7 +17306,7 @@
                 </a:spcAft>
                 <a:buNone/>
               </a:pPr>
-              <a:endParaRPr/>
+              <a:endParaRPr dirty="0"/>
             </a:p>
           </p:txBody>
         </p:sp>
@@ -17370,7 +17370,7 @@
                 </a:spcAft>
                 <a:buNone/>
               </a:pPr>
-              <a:endParaRPr/>
+              <a:endParaRPr dirty="0"/>
             </a:p>
           </p:txBody>
         </p:sp>
@@ -17434,7 +17434,7 @@
                 </a:spcAft>
                 <a:buNone/>
               </a:pPr>
-              <a:endParaRPr/>
+              <a:endParaRPr dirty="0"/>
             </a:p>
           </p:txBody>
         </p:sp>
@@ -17504,7 +17504,7 @@
                 </a:spcAft>
                 <a:buNone/>
               </a:pPr>
-              <a:endParaRPr/>
+              <a:endParaRPr dirty="0"/>
             </a:p>
           </p:txBody>
         </p:sp>
@@ -17568,7 +17568,7 @@
                 </a:spcAft>
                 <a:buNone/>
               </a:pPr>
-              <a:endParaRPr/>
+              <a:endParaRPr dirty="0"/>
             </a:p>
           </p:txBody>
         </p:sp>
@@ -17632,7 +17632,7 @@
                 </a:spcAft>
                 <a:buNone/>
               </a:pPr>
-              <a:endParaRPr/>
+              <a:endParaRPr dirty="0"/>
             </a:p>
           </p:txBody>
         </p:sp>
@@ -17696,7 +17696,7 @@
                 </a:spcAft>
                 <a:buNone/>
               </a:pPr>
-              <a:endParaRPr/>
+              <a:endParaRPr dirty="0"/>
             </a:p>
           </p:txBody>
         </p:sp>
@@ -17766,7 +17766,7 @@
                 </a:spcAft>
                 <a:buNone/>
               </a:pPr>
-              <a:endParaRPr/>
+              <a:endParaRPr dirty="0"/>
             </a:p>
           </p:txBody>
         </p:sp>
@@ -17820,7 +17820,7 @@
                   </a:spcAft>
                   <a:buNone/>
                 </a:pPr>
-                <a:endParaRPr/>
+                <a:endParaRPr dirty="0"/>
               </a:p>
             </p:txBody>
           </p:sp>
@@ -17860,7 +17860,7 @@
                   </a:spcAft>
                   <a:buNone/>
                 </a:pPr>
-                <a:endParaRPr/>
+                <a:endParaRPr dirty="0"/>
               </a:p>
             </p:txBody>
           </p:sp>
@@ -17900,7 +17900,7 @@
                   </a:spcAft>
                   <a:buNone/>
                 </a:pPr>
-                <a:endParaRPr/>
+                <a:endParaRPr dirty="0"/>
               </a:p>
             </p:txBody>
           </p:sp>
@@ -17940,7 +17940,7 @@
                   </a:spcAft>
                   <a:buNone/>
                 </a:pPr>
-                <a:endParaRPr/>
+                <a:endParaRPr dirty="0"/>
               </a:p>
             </p:txBody>
           </p:sp>
@@ -19289,7 +19289,7 @@
                 </a:spcAft>
                 <a:buNone/>
               </a:pPr>
-              <a:endParaRPr/>
+              <a:endParaRPr dirty="0"/>
             </a:p>
           </p:txBody>
         </p:sp>
@@ -19353,7 +19353,7 @@
                 </a:spcAft>
                 <a:buNone/>
               </a:pPr>
-              <a:endParaRPr/>
+              <a:endParaRPr dirty="0"/>
             </a:p>
           </p:txBody>
         </p:sp>
@@ -19417,7 +19417,7 @@
                 </a:spcAft>
                 <a:buNone/>
               </a:pPr>
-              <a:endParaRPr/>
+              <a:endParaRPr dirty="0"/>
             </a:p>
           </p:txBody>
         </p:sp>
@@ -19487,7 +19487,7 @@
                 </a:spcAft>
                 <a:buNone/>
               </a:pPr>
-              <a:endParaRPr/>
+              <a:endParaRPr dirty="0"/>
             </a:p>
           </p:txBody>
         </p:sp>
@@ -19551,7 +19551,7 @@
                 </a:spcAft>
                 <a:buNone/>
               </a:pPr>
-              <a:endParaRPr/>
+              <a:endParaRPr dirty="0"/>
             </a:p>
           </p:txBody>
         </p:sp>
@@ -19615,7 +19615,7 @@
                 </a:spcAft>
                 <a:buNone/>
               </a:pPr>
-              <a:endParaRPr/>
+              <a:endParaRPr dirty="0"/>
             </a:p>
           </p:txBody>
         </p:sp>
@@ -19679,7 +19679,7 @@
                 </a:spcAft>
                 <a:buNone/>
               </a:pPr>
-              <a:endParaRPr/>
+              <a:endParaRPr dirty="0"/>
             </a:p>
           </p:txBody>
         </p:sp>
@@ -19749,7 +19749,7 @@
                 </a:spcAft>
                 <a:buNone/>
               </a:pPr>
-              <a:endParaRPr/>
+              <a:endParaRPr dirty="0"/>
             </a:p>
           </p:txBody>
         </p:sp>
@@ -19803,7 +19803,7 @@
                   </a:spcAft>
                   <a:buNone/>
                 </a:pPr>
-                <a:endParaRPr/>
+                <a:endParaRPr dirty="0"/>
               </a:p>
             </p:txBody>
           </p:sp>
@@ -19843,7 +19843,7 @@
                   </a:spcAft>
                   <a:buNone/>
                 </a:pPr>
-                <a:endParaRPr/>
+                <a:endParaRPr dirty="0"/>
               </a:p>
             </p:txBody>
           </p:sp>
@@ -19883,7 +19883,7 @@
                   </a:spcAft>
                   <a:buNone/>
                 </a:pPr>
-                <a:endParaRPr/>
+                <a:endParaRPr dirty="0"/>
               </a:p>
             </p:txBody>
           </p:sp>
@@ -19923,7 +19923,7 @@
                   </a:spcAft>
                   <a:buNone/>
                 </a:pPr>
-                <a:endParaRPr/>
+                <a:endParaRPr dirty="0"/>
               </a:p>
             </p:txBody>
           </p:sp>
@@ -20924,7 +20924,7 @@
                 </a:spcAft>
                 <a:buNone/>
               </a:pPr>
-              <a:endParaRPr/>
+              <a:endParaRPr dirty="0"/>
             </a:p>
           </p:txBody>
         </p:sp>
@@ -20988,7 +20988,7 @@
                 </a:spcAft>
                 <a:buNone/>
               </a:pPr>
-              <a:endParaRPr/>
+              <a:endParaRPr dirty="0"/>
             </a:p>
           </p:txBody>
         </p:sp>
@@ -21052,7 +21052,7 @@
                 </a:spcAft>
                 <a:buNone/>
               </a:pPr>
-              <a:endParaRPr/>
+              <a:endParaRPr dirty="0"/>
             </a:p>
           </p:txBody>
         </p:sp>
@@ -21122,7 +21122,7 @@
                 </a:spcAft>
                 <a:buNone/>
               </a:pPr>
-              <a:endParaRPr/>
+              <a:endParaRPr dirty="0"/>
             </a:p>
           </p:txBody>
         </p:sp>
@@ -21186,7 +21186,7 @@
                 </a:spcAft>
                 <a:buNone/>
               </a:pPr>
-              <a:endParaRPr/>
+              <a:endParaRPr dirty="0"/>
             </a:p>
           </p:txBody>
         </p:sp>
@@ -21250,7 +21250,7 @@
                 </a:spcAft>
                 <a:buNone/>
               </a:pPr>
-              <a:endParaRPr/>
+              <a:endParaRPr dirty="0"/>
             </a:p>
           </p:txBody>
         </p:sp>
@@ -21314,7 +21314,7 @@
                 </a:spcAft>
                 <a:buNone/>
               </a:pPr>
-              <a:endParaRPr/>
+              <a:endParaRPr dirty="0"/>
             </a:p>
           </p:txBody>
         </p:sp>
@@ -21384,7 +21384,7 @@
                 </a:spcAft>
                 <a:buNone/>
               </a:pPr>
-              <a:endParaRPr/>
+              <a:endParaRPr dirty="0"/>
             </a:p>
           </p:txBody>
         </p:sp>
@@ -21424,7 +21424,7 @@
                 </a:spcAft>
                 <a:buNone/>
               </a:pPr>
-              <a:endParaRPr/>
+              <a:endParaRPr dirty="0"/>
             </a:p>
           </p:txBody>
         </p:sp>
@@ -21464,7 +21464,7 @@
                 </a:spcAft>
                 <a:buNone/>
               </a:pPr>
-              <a:endParaRPr/>
+              <a:endParaRPr dirty="0"/>
             </a:p>
           </p:txBody>
         </p:sp>
@@ -21504,7 +21504,7 @@
                 </a:spcAft>
                 <a:buNone/>
               </a:pPr>
-              <a:endParaRPr/>
+              <a:endParaRPr dirty="0"/>
             </a:p>
           </p:txBody>
         </p:sp>
@@ -21544,7 +21544,7 @@
                 </a:spcAft>
                 <a:buNone/>
               </a:pPr>
-              <a:endParaRPr/>
+              <a:endParaRPr dirty="0"/>
             </a:p>
           </p:txBody>
         </p:sp>
@@ -21584,7 +21584,7 @@
                 </a:spcAft>
                 <a:buNone/>
               </a:pPr>
-              <a:endParaRPr/>
+              <a:endParaRPr dirty="0"/>
             </a:p>
           </p:txBody>
         </p:sp>
@@ -21624,7 +21624,7 @@
                 </a:spcAft>
                 <a:buNone/>
               </a:pPr>
-              <a:endParaRPr/>
+              <a:endParaRPr dirty="0"/>
             </a:p>
           </p:txBody>
         </p:sp>
@@ -22160,7 +22160,7 @@
               </a:spcAft>
               <a:buNone/>
             </a:pPr>
-            <a:endParaRPr/>
+            <a:endParaRPr dirty="0"/>
           </a:p>
         </p:txBody>
       </p:sp>
@@ -22499,7 +22499,7 @@
               </a:spcAft>
               <a:buNone/>
             </a:pPr>
-            <a:endParaRPr/>
+            <a:endParaRPr dirty="0"/>
           </a:p>
         </p:txBody>
       </p:sp>
@@ -25741,7 +25741,7 @@
               </a:spcAft>
               <a:buNone/>
             </a:pPr>
-            <a:endParaRPr/>
+            <a:endParaRPr dirty="0"/>
           </a:p>
         </p:txBody>
       </p:sp>
@@ -26106,7 +26106,7 @@
               </a:spcAft>
               <a:buNone/>
             </a:pPr>
-            <a:endParaRPr/>
+            <a:endParaRPr dirty="0"/>
           </a:p>
         </p:txBody>
       </p:sp>
@@ -26283,7 +26283,7 @@
               </a:spcAft>
               <a:buNone/>
             </a:pPr>
-            <a:endParaRPr/>
+            <a:endParaRPr dirty="0"/>
           </a:p>
         </p:txBody>
       </p:sp>
@@ -26404,7 +26404,7 @@
               </a:spcAft>
               <a:buNone/>
             </a:pPr>
-            <a:endParaRPr/>
+            <a:endParaRPr dirty="0"/>
           </a:p>
         </p:txBody>
       </p:sp>
@@ -28905,6 +28905,52 @@
       </p:grpSpPr>
       <p:sp>
         <p:nvSpPr>
+          <p:cNvPr id="2" name="Прямоугольник: скругленные углы 1">
+            <a:extLst>
+              <a:ext uri="{FF2B5EF4-FFF2-40B4-BE49-F238E27FC236}">
+                <a16:creationId xmlns:a16="http://schemas.microsoft.com/office/drawing/2014/main" id="{209073E8-A182-32BC-4F2B-A9C5ACD0D5C8}"/>
+              </a:ext>
+            </a:extLst>
+          </p:cNvPr>
+          <p:cNvSpPr/>
+          <p:nvPr/>
+        </p:nvSpPr>
+        <p:spPr>
+          <a:xfrm>
+            <a:off x="4372072" y="3675277"/>
+            <a:ext cx="4470238" cy="792600"/>
+          </a:xfrm>
+          <a:prstGeom prst="roundRect">
+            <a:avLst/>
+          </a:prstGeom>
+        </p:spPr>
+        <p:style>
+          <a:lnRef idx="2">
+            <a:schemeClr val="accent1">
+              <a:shade val="15000"/>
+            </a:schemeClr>
+          </a:lnRef>
+          <a:fillRef idx="1">
+            <a:schemeClr val="accent1"/>
+          </a:fillRef>
+          <a:effectRef idx="0">
+            <a:schemeClr val="accent1"/>
+          </a:effectRef>
+          <a:fontRef idx="minor">
+            <a:schemeClr val="lt1"/>
+          </a:fontRef>
+        </p:style>
+        <p:txBody>
+          <a:bodyPr rtlCol="0" anchor="ctr"/>
+          <a:lstStyle/>
+          <a:p>
+            <a:pPr algn="ctr"/>
+            <a:endParaRPr lang="ru-RU" dirty="0"/>
+          </a:p>
+        </p:txBody>
+      </p:sp>
+      <p:sp>
+        <p:nvSpPr>
           <p:cNvPr id="612" name="Google Shape;612;p66"/>
           <p:cNvSpPr txBox="1">
             <a:spLocks noGrp="1"/>
@@ -28990,8 +29036,8 @@
             <a:r>
               <a:rPr lang="ru-RU" sz="1400" dirty="0">
                 <a:solidFill>
-                  <a:schemeClr val="tx2">
-                    <a:lumMod val="75000"/>
+                  <a:schemeClr val="accent4">
+                    <a:lumMod val="50000"/>
                   </a:schemeClr>
                 </a:solidFill>
               </a:rPr>
@@ -29011,8 +29057,8 @@
             <a:r>
               <a:rPr lang="ru-RU" sz="1400" dirty="0">
                 <a:solidFill>
-                  <a:schemeClr val="tx2">
-                    <a:lumMod val="75000"/>
+                  <a:schemeClr val="accent4">
+                    <a:lumMod val="50000"/>
                   </a:schemeClr>
                 </a:solidFill>
               </a:rPr>
@@ -29020,8 +29066,8 @@
             </a:r>
             <a:endParaRPr sz="1400" dirty="0">
               <a:solidFill>
-                <a:schemeClr val="tx2">
-                  <a:lumMod val="75000"/>
+                <a:schemeClr val="accent4">
+                  <a:lumMod val="50000"/>
                 </a:schemeClr>
               </a:solidFill>
             </a:endParaRPr>
@@ -29110,7 +29156,7 @@
                 </a:spcAft>
                 <a:buNone/>
               </a:pPr>
-              <a:endParaRPr/>
+              <a:endParaRPr dirty="0"/>
             </a:p>
           </p:txBody>
         </p:sp>
@@ -29183,7 +29229,7 @@
                 </a:spcAft>
                 <a:buNone/>
               </a:pPr>
-              <a:endParaRPr/>
+              <a:endParaRPr dirty="0"/>
             </a:p>
           </p:txBody>
         </p:sp>
@@ -29244,7 +29290,7 @@
                 </a:spcAft>
                 <a:buNone/>
               </a:pPr>
-              <a:endParaRPr/>
+              <a:endParaRPr dirty="0"/>
             </a:p>
           </p:txBody>
         </p:sp>
@@ -29316,7 +29362,7 @@
                 </a:spcAft>
                 <a:buNone/>
               </a:pPr>
-              <a:endParaRPr/>
+              <a:endParaRPr dirty="0"/>
             </a:p>
           </p:txBody>
         </p:sp>
@@ -29388,7 +29434,7 @@
                 </a:spcAft>
                 <a:buNone/>
               </a:pPr>
-              <a:endParaRPr/>
+              <a:endParaRPr dirty="0"/>
             </a:p>
           </p:txBody>
         </p:sp>
@@ -29460,7 +29506,7 @@
                 </a:spcAft>
                 <a:buNone/>
               </a:pPr>
-              <a:endParaRPr/>
+              <a:endParaRPr dirty="0"/>
             </a:p>
           </p:txBody>
         </p:sp>
@@ -29528,7 +29574,7 @@
                 </a:spcAft>
                 <a:buNone/>
               </a:pPr>
-              <a:endParaRPr/>
+              <a:endParaRPr dirty="0"/>
             </a:p>
           </p:txBody>
         </p:sp>
@@ -29600,7 +29646,7 @@
                 </a:spcAft>
                 <a:buNone/>
               </a:pPr>
-              <a:endParaRPr/>
+              <a:endParaRPr dirty="0"/>
             </a:p>
           </p:txBody>
         </p:sp>
@@ -29672,7 +29718,7 @@
                 </a:spcAft>
                 <a:buNone/>
               </a:pPr>
-              <a:endParaRPr/>
+              <a:endParaRPr dirty="0"/>
             </a:p>
           </p:txBody>
         </p:sp>
@@ -29736,7 +29782,7 @@
                 </a:spcAft>
                 <a:buNone/>
               </a:pPr>
-              <a:endParaRPr/>
+              <a:endParaRPr dirty="0"/>
             </a:p>
           </p:txBody>
         </p:sp>
@@ -29809,7 +29855,7 @@
                 </a:spcAft>
                 <a:buNone/>
               </a:pPr>
-              <a:endParaRPr/>
+              <a:endParaRPr dirty="0"/>
             </a:p>
           </p:txBody>
         </p:sp>
@@ -29870,7 +29916,7 @@
                 </a:spcAft>
                 <a:buNone/>
               </a:pPr>
-              <a:endParaRPr/>
+              <a:endParaRPr dirty="0"/>
             </a:p>
           </p:txBody>
         </p:sp>
@@ -29942,7 +29988,7 @@
                 </a:spcAft>
                 <a:buNone/>
               </a:pPr>
-              <a:endParaRPr/>
+              <a:endParaRPr dirty="0"/>
             </a:p>
           </p:txBody>
         </p:sp>
@@ -30014,7 +30060,7 @@
                 </a:spcAft>
                 <a:buNone/>
               </a:pPr>
-              <a:endParaRPr/>
+              <a:endParaRPr dirty="0"/>
             </a:p>
           </p:txBody>
         </p:sp>
@@ -30086,7 +30132,7 @@
                 </a:spcAft>
                 <a:buNone/>
               </a:pPr>
-              <a:endParaRPr/>
+              <a:endParaRPr dirty="0"/>
             </a:p>
           </p:txBody>
         </p:sp>
@@ -30154,7 +30200,7 @@
                 </a:spcAft>
                 <a:buNone/>
               </a:pPr>
-              <a:endParaRPr/>
+              <a:endParaRPr dirty="0"/>
             </a:p>
           </p:txBody>
         </p:sp>
@@ -30226,7 +30272,7 @@
                 </a:spcAft>
                 <a:buNone/>
               </a:pPr>
-              <a:endParaRPr/>
+              <a:endParaRPr dirty="0"/>
             </a:p>
           </p:txBody>
         </p:sp>
@@ -30298,7 +30344,7 @@
                 </a:spcAft>
                 <a:buNone/>
               </a:pPr>
-              <a:endParaRPr/>
+              <a:endParaRPr dirty="0"/>
             </a:p>
           </p:txBody>
         </p:sp>
@@ -30371,7 +30417,7 @@
                 </a:spcAft>
                 <a:buNone/>
               </a:pPr>
-              <a:endParaRPr/>
+              <a:endParaRPr dirty="0"/>
             </a:p>
           </p:txBody>
         </p:sp>
@@ -30432,7 +30478,7 @@
                 </a:spcAft>
                 <a:buNone/>
               </a:pPr>
-              <a:endParaRPr/>
+              <a:endParaRPr dirty="0"/>
             </a:p>
           </p:txBody>
         </p:sp>
@@ -30504,7 +30550,7 @@
                 </a:spcAft>
                 <a:buNone/>
               </a:pPr>
-              <a:endParaRPr/>
+              <a:endParaRPr dirty="0"/>
             </a:p>
           </p:txBody>
         </p:sp>
@@ -30576,7 +30622,7 @@
                 </a:spcAft>
                 <a:buNone/>
               </a:pPr>
-              <a:endParaRPr/>
+              <a:endParaRPr dirty="0"/>
             </a:p>
           </p:txBody>
         </p:sp>
@@ -30648,7 +30694,7 @@
                 </a:spcAft>
                 <a:buNone/>
               </a:pPr>
-              <a:endParaRPr/>
+              <a:endParaRPr dirty="0"/>
             </a:p>
           </p:txBody>
         </p:sp>
@@ -30716,7 +30762,7 @@
                 </a:spcAft>
                 <a:buNone/>
               </a:pPr>
-              <a:endParaRPr/>
+              <a:endParaRPr dirty="0"/>
             </a:p>
           </p:txBody>
         </p:sp>
@@ -30788,7 +30834,7 @@
                 </a:spcAft>
                 <a:buNone/>
               </a:pPr>
-              <a:endParaRPr/>
+              <a:endParaRPr dirty="0"/>
             </a:p>
           </p:txBody>
         </p:sp>
@@ -30860,7 +30906,7 @@
                 </a:spcAft>
                 <a:buNone/>
               </a:pPr>
-              <a:endParaRPr/>
+              <a:endParaRPr dirty="0"/>
             </a:p>
           </p:txBody>
         </p:sp>
@@ -30935,7 +30981,7 @@
                 </a:spcAft>
                 <a:buNone/>
               </a:pPr>
-              <a:endParaRPr/>
+              <a:endParaRPr dirty="0"/>
             </a:p>
           </p:txBody>
         </p:sp>
@@ -31010,7 +31056,7 @@
                 </a:spcAft>
                 <a:buNone/>
               </a:pPr>
-              <a:endParaRPr/>
+              <a:endParaRPr dirty="0"/>
             </a:p>
           </p:txBody>
         </p:sp>
@@ -31074,7 +31120,7 @@
                 </a:spcAft>
                 <a:buNone/>
               </a:pPr>
-              <a:endParaRPr/>
+              <a:endParaRPr dirty="0"/>
             </a:p>
           </p:txBody>
         </p:sp>
@@ -31139,7 +31185,7 @@
                 </a:spcAft>
                 <a:buNone/>
               </a:pPr>
-              <a:endParaRPr/>
+              <a:endParaRPr dirty="0"/>
             </a:p>
           </p:txBody>
         </p:sp>
@@ -31199,7 +31245,7 @@
                 </a:spcAft>
                 <a:buNone/>
               </a:pPr>
-              <a:endParaRPr/>
+              <a:endParaRPr dirty="0"/>
             </a:p>
           </p:txBody>
         </p:sp>
@@ -31259,7 +31305,7 @@
                 </a:spcAft>
                 <a:buNone/>
               </a:pPr>
-              <a:endParaRPr/>
+              <a:endParaRPr dirty="0"/>
             </a:p>
           </p:txBody>
         </p:sp>
@@ -31327,7 +31373,7 @@
                 </a:spcAft>
                 <a:buNone/>
               </a:pPr>
-              <a:endParaRPr/>
+              <a:endParaRPr dirty="0"/>
             </a:p>
           </p:txBody>
         </p:sp>
@@ -31392,7 +31438,7 @@
                 </a:spcAft>
                 <a:buNone/>
               </a:pPr>
-              <a:endParaRPr/>
+              <a:endParaRPr dirty="0"/>
             </a:p>
           </p:txBody>
         </p:sp>
@@ -31481,7 +31527,7 @@
                 </a:spcAft>
                 <a:buNone/>
               </a:pPr>
-              <a:endParaRPr/>
+              <a:endParaRPr dirty="0"/>
             </a:p>
           </p:txBody>
         </p:sp>
@@ -31570,7 +31616,7 @@
                 </a:spcAft>
                 <a:buNone/>
               </a:pPr>
-              <a:endParaRPr/>
+              <a:endParaRPr dirty="0"/>
             </a:p>
           </p:txBody>
         </p:sp>
@@ -31652,7 +31698,7 @@
                 </a:spcAft>
                 <a:buNone/>
               </a:pPr>
-              <a:endParaRPr/>
+              <a:endParaRPr dirty="0"/>
             </a:p>
           </p:txBody>
         </p:sp>
@@ -31734,7 +31780,7 @@
                 </a:spcAft>
                 <a:buNone/>
               </a:pPr>
-              <a:endParaRPr/>
+              <a:endParaRPr dirty="0"/>
             </a:p>
           </p:txBody>
         </p:sp>
@@ -31832,7 +31878,7 @@
                 </a:spcAft>
                 <a:buNone/>
               </a:pPr>
-              <a:endParaRPr/>
+              <a:endParaRPr dirty="0"/>
             </a:p>
           </p:txBody>
         </p:sp>
@@ -31904,7 +31950,7 @@
                 </a:spcAft>
                 <a:buNone/>
               </a:pPr>
-              <a:endParaRPr/>
+              <a:endParaRPr dirty="0"/>
             </a:p>
           </p:txBody>
         </p:sp>
@@ -31987,7 +32033,7 @@
                 </a:spcAft>
                 <a:buNone/>
               </a:pPr>
-              <a:endParaRPr/>
+              <a:endParaRPr dirty="0"/>
             </a:p>
           </p:txBody>
         </p:sp>
@@ -32055,7 +32101,7 @@
                 </a:spcAft>
                 <a:buNone/>
               </a:pPr>
-              <a:endParaRPr/>
+              <a:endParaRPr dirty="0"/>
             </a:p>
           </p:txBody>
         </p:sp>
@@ -32151,7 +32197,7 @@
                 </a:spcAft>
                 <a:buNone/>
               </a:pPr>
-              <a:endParaRPr/>
+              <a:endParaRPr dirty="0"/>
             </a:p>
           </p:txBody>
         </p:sp>
@@ -32223,7 +32269,7 @@
                 </a:spcAft>
                 <a:buNone/>
               </a:pPr>
-              <a:endParaRPr/>
+              <a:endParaRPr dirty="0"/>
             </a:p>
           </p:txBody>
         </p:sp>
@@ -32306,7 +32352,7 @@
                 </a:spcAft>
                 <a:buNone/>
               </a:pPr>
-              <a:endParaRPr/>
+              <a:endParaRPr dirty="0"/>
             </a:p>
           </p:txBody>
         </p:sp>
@@ -32374,7 +32420,7 @@
                 </a:spcAft>
                 <a:buNone/>
               </a:pPr>
-              <a:endParaRPr/>
+              <a:endParaRPr dirty="0"/>
             </a:p>
           </p:txBody>
         </p:sp>
@@ -32470,7 +32516,7 @@
                 </a:spcAft>
                 <a:buNone/>
               </a:pPr>
-              <a:endParaRPr/>
+              <a:endParaRPr dirty="0"/>
             </a:p>
           </p:txBody>
         </p:sp>
@@ -32542,7 +32588,7 @@
                 </a:spcAft>
                 <a:buNone/>
               </a:pPr>
-              <a:endParaRPr/>
+              <a:endParaRPr dirty="0"/>
             </a:p>
           </p:txBody>
         </p:sp>
@@ -32614,7 +32660,7 @@
                 </a:spcAft>
                 <a:buNone/>
               </a:pPr>
-              <a:endParaRPr/>
+              <a:endParaRPr dirty="0"/>
             </a:p>
           </p:txBody>
         </p:sp>
@@ -32731,7 +32777,7 @@
               </a:spcAft>
               <a:buNone/>
             </a:pPr>
-            <a:endParaRPr/>
+            <a:endParaRPr dirty="0"/>
           </a:p>
         </p:txBody>
       </p:sp>
@@ -32847,7 +32893,7 @@
               </a:spcAft>
               <a:buNone/>
             </a:pPr>
-            <a:endParaRPr/>
+            <a:endParaRPr dirty="0"/>
           </a:p>
         </p:txBody>
       </p:sp>
@@ -32963,7 +33009,7 @@
               </a:spcAft>
               <a:buNone/>
             </a:pPr>
-            <a:endParaRPr/>
+            <a:endParaRPr dirty="0"/>
           </a:p>
         </p:txBody>
       </p:sp>
@@ -33041,14 +33087,13 @@
         </p:nvPicPr>
         <p:blipFill>
           <a:blip r:embed="rId2"/>
-          <a:stretch>
-            <a:fillRect/>
-          </a:stretch>
+          <a:srcRect/>
+          <a:stretch/>
         </p:blipFill>
         <p:spPr>
           <a:xfrm>
-            <a:off x="2830707" y="907615"/>
-            <a:ext cx="3482585" cy="3961565"/>
+            <a:off x="2843884" y="907615"/>
+            <a:ext cx="3456231" cy="3961565"/>
           </a:xfrm>
           <a:prstGeom prst="rect">
             <a:avLst/>
@@ -33761,21 +33806,7 @@
                 <a:latin typeface="Roboto" panose="02000000000000000000" pitchFamily="2" charset="0"/>
                 <a:ea typeface="Roboto" panose="02000000000000000000" pitchFamily="2" charset="0"/>
               </a:rPr>
-              <a:t>(самый лучший </a:t>
-            </a:r>
-            <a:r>
-              <a:rPr lang="ru-RU" sz="1100" b="0" dirty="0" err="1">
-                <a:latin typeface="Roboto" panose="02000000000000000000" pitchFamily="2" charset="0"/>
-                <a:ea typeface="Roboto" panose="02000000000000000000" pitchFamily="2" charset="0"/>
-              </a:rPr>
-              <a:t>фронтенд</a:t>
-            </a:r>
-            <a:r>
-              <a:rPr lang="ru-RU" sz="1100" b="0" dirty="0">
-                <a:latin typeface="Roboto" panose="02000000000000000000" pitchFamily="2" charset="0"/>
-                <a:ea typeface="Roboto" panose="02000000000000000000" pitchFamily="2" charset="0"/>
-              </a:rPr>
-              <a:t> разработчик)</a:t>
+              <a:t>(самый лучший фронтенд разработчик)</a:t>
             </a:r>
           </a:p>
         </p:txBody>
@@ -34375,21 +34406,7 @@
                 <a:latin typeface="Roboto" panose="02000000000000000000" pitchFamily="2" charset="0"/>
                 <a:ea typeface="Roboto" panose="02000000000000000000" pitchFamily="2" charset="0"/>
               </a:rPr>
-              <a:t>(самый гениальный </a:t>
-            </a:r>
-            <a:r>
-              <a:rPr lang="ru-RU" sz="1100" b="0" dirty="0" err="1">
-                <a:latin typeface="Roboto" panose="02000000000000000000" pitchFamily="2" charset="0"/>
-                <a:ea typeface="Roboto" panose="02000000000000000000" pitchFamily="2" charset="0"/>
-              </a:rPr>
-              <a:t>проджект</a:t>
-            </a:r>
-            <a:r>
-              <a:rPr lang="ru-RU" sz="1100" b="0" dirty="0">
-                <a:latin typeface="Roboto" panose="02000000000000000000" pitchFamily="2" charset="0"/>
-                <a:ea typeface="Roboto" panose="02000000000000000000" pitchFamily="2" charset="0"/>
-              </a:rPr>
-              <a:t> менеджер)</a:t>
+              <a:t>(самый гениальный проджект менеджер)</a:t>
             </a:r>
           </a:p>
         </p:txBody>
@@ -34689,21 +34706,7 @@
                 <a:latin typeface="Roboto" panose="02000000000000000000" pitchFamily="2" charset="0"/>
                 <a:ea typeface="Roboto" panose="02000000000000000000" pitchFamily="2" charset="0"/>
               </a:rPr>
-              <a:t>(</a:t>
-            </a:r>
-            <a:r>
-              <a:rPr lang="ru-RU" sz="1100" b="0" dirty="0" err="1">
-                <a:latin typeface="Roboto" panose="02000000000000000000" pitchFamily="2" charset="0"/>
-                <a:ea typeface="Roboto" panose="02000000000000000000" pitchFamily="2" charset="0"/>
-              </a:rPr>
-              <a:t>супермегатестировщик</a:t>
-            </a:r>
-            <a:r>
-              <a:rPr lang="ru-RU" sz="1100" b="0" dirty="0">
-                <a:latin typeface="Roboto" panose="02000000000000000000" pitchFamily="2" charset="0"/>
-                <a:ea typeface="Roboto" panose="02000000000000000000" pitchFamily="2" charset="0"/>
-              </a:rPr>
-              <a:t>)</a:t>
+              <a:t>(супермегатестировщик)</a:t>
             </a:r>
           </a:p>
         </p:txBody>
@@ -35127,7 +35130,7 @@
               <a:tabLst/>
             </a:pPr>
             <a:r>
-              <a:rPr lang="ru-RU" altLang="ru-RU" sz="1600" b="1" dirty="0">
+              <a:rPr lang="ru-RU" altLang="ru-RU" sz="1600" b="1" kern="1200" dirty="0">
                 <a:solidFill>
                   <a:schemeClr val="accent3">
                     <a:lumMod val="75000"/>
@@ -35136,7 +35139,19 @@
                 <a:latin typeface="Roboto" panose="02000000000000000000" pitchFamily="2" charset="0"/>
                 <a:ea typeface="Roboto" panose="02000000000000000000" pitchFamily="2" charset="0"/>
               </a:rPr>
-              <a:t>Основные задачи проекта:</a:t>
+              <a:t>Основные задачи проекта</a:t>
+            </a:r>
+            <a:r>
+              <a:rPr lang="ru-RU" altLang="ru-RU" sz="1600" b="1" dirty="0">
+                <a:solidFill>
+                  <a:schemeClr val="accent3">
+                    <a:lumMod val="75000"/>
+                  </a:schemeClr>
+                </a:solidFill>
+                <a:latin typeface="Roboto" panose="02000000000000000000" pitchFamily="2" charset="0"/>
+                <a:ea typeface="Roboto" panose="02000000000000000000" pitchFamily="2" charset="0"/>
+              </a:rPr>
+              <a:t>:</a:t>
             </a:r>
             <a:endParaRPr lang="en-US" altLang="ru-RU" sz="1600" b="1" dirty="0">
               <a:solidFill>
@@ -35502,13 +35517,8 @@
             </a:r>
             <a:r>
               <a:rPr lang="ru-RU" dirty="0"/>
-              <a:t> </a:t>
+              <a:t> Ганта</a:t>
             </a:r>
-            <a:r>
-              <a:rPr lang="ru-RU" dirty="0" err="1"/>
-              <a:t>Ганта</a:t>
-            </a:r>
-            <a:endParaRPr lang="ru-RU" dirty="0"/>
           </a:p>
         </p:txBody>
       </p:sp>

--- a/Report/E-Book.pptx
+++ b/Report/E-Book.pptx
@@ -28917,24 +28917,30 @@
         </p:nvSpPr>
         <p:spPr>
           <a:xfrm>
-            <a:off x="4372072" y="3675277"/>
-            <a:ext cx="4470238" cy="792600"/>
+            <a:off x="4832254" y="3675277"/>
+            <a:ext cx="4010056" cy="792600"/>
           </a:xfrm>
           <a:prstGeom prst="roundRect">
             <a:avLst/>
           </a:prstGeom>
+          <a:solidFill>
+            <a:schemeClr val="accent3">
+              <a:lumMod val="20000"/>
+              <a:lumOff val="80000"/>
+            </a:schemeClr>
+          </a:solidFill>
         </p:spPr>
         <p:style>
           <a:lnRef idx="2">
-            <a:schemeClr val="accent1">
+            <a:schemeClr val="accent5">
               <a:shade val="15000"/>
             </a:schemeClr>
           </a:lnRef>
           <a:fillRef idx="1">
-            <a:schemeClr val="accent1"/>
+            <a:schemeClr val="accent5"/>
           </a:fillRef>
           <a:effectRef idx="0">
-            <a:schemeClr val="accent1"/>
+            <a:schemeClr val="accent5"/>
           </a:effectRef>
           <a:fontRef idx="minor">
             <a:schemeClr val="lt1"/>
@@ -29011,8 +29017,8 @@
         </p:nvSpPr>
         <p:spPr>
           <a:xfrm>
-            <a:off x="4010857" y="3675277"/>
-            <a:ext cx="4831453" cy="792600"/>
+            <a:off x="4405024" y="3669236"/>
+            <a:ext cx="4424617" cy="792600"/>
           </a:xfrm>
           <a:prstGeom prst="rect">
             <a:avLst/>
@@ -35993,6 +35999,36 @@
           </a:p>
         </p:txBody>
       </p:sp>
+      <p:pic>
+        <p:nvPicPr>
+          <p:cNvPr id="3" name="Рисунок 2" descr="Изображение выглядит как текст, снимок экрана, число, диаграмма&#10;&#10;Контент, сгенерированный ИИ, может содержать ошибки.">
+            <a:extLst>
+              <a:ext uri="{FF2B5EF4-FFF2-40B4-BE49-F238E27FC236}">
+                <a16:creationId xmlns:a16="http://schemas.microsoft.com/office/drawing/2014/main" id="{CDA6F6FB-9918-45D7-378E-DE85120418AA}"/>
+              </a:ext>
+            </a:extLst>
+          </p:cNvPr>
+          <p:cNvPicPr>
+            <a:picLocks noChangeAspect="1"/>
+          </p:cNvPicPr>
+          <p:nvPr/>
+        </p:nvPicPr>
+        <p:blipFill>
+          <a:blip r:embed="rId2"/>
+          <a:stretch>
+            <a:fillRect/>
+          </a:stretch>
+        </p:blipFill>
+        <p:spPr>
+          <a:xfrm>
+            <a:off x="1498432" y="998220"/>
+            <a:ext cx="6147136" cy="3922647"/>
+          </a:xfrm>
+          <a:prstGeom prst="rect">
+            <a:avLst/>
+          </a:prstGeom>
+        </p:spPr>
+      </p:pic>
     </p:spTree>
     <p:extLst>
       <p:ext uri="{BB962C8B-B14F-4D97-AF65-F5344CB8AC3E}">
@@ -38057,6 +38093,1731 @@
               <a:t>Backend</a:t>
             </a:r>
             <a:endParaRPr lang="ru-RU" dirty="0"/>
+          </a:p>
+        </p:txBody>
+      </p:sp>
+      <p:pic>
+        <p:nvPicPr>
+          <p:cNvPr id="1028" name="Picture 4">
+            <a:extLst>
+              <a:ext uri="{FF2B5EF4-FFF2-40B4-BE49-F238E27FC236}">
+                <a16:creationId xmlns:a16="http://schemas.microsoft.com/office/drawing/2014/main" id="{37A6B3EB-8073-BE6F-0DAB-AAA57424BA98}"/>
+              </a:ext>
+            </a:extLst>
+          </p:cNvPr>
+          <p:cNvPicPr>
+            <a:picLocks noChangeAspect="1" noChangeArrowheads="1"/>
+          </p:cNvPicPr>
+          <p:nvPr/>
+        </p:nvPicPr>
+        <p:blipFill>
+          <a:blip r:embed="rId7">
+            <a:extLst>
+              <a:ext uri="{BEBA8EAE-BF5A-486C-A8C5-ECC9F3942E4B}">
+                <a14:imgProps xmlns:a14="http://schemas.microsoft.com/office/drawing/2010/main">
+                  <a14:imgLayer r:embed="rId8">
+                    <a14:imgEffect>
+                      <a14:backgroundRemoval t="1495" b="96603" l="3261" r="98234">
+                        <a14:foregroundMark x1="5027" y1="43342" x2="3668" y2="58016"/>
+                        <a14:foregroundMark x1="3668" y1="58016" x2="3261" y2="58016"/>
+                        <a14:foregroundMark x1="49728" y1="7337" x2="59375" y2="4755"/>
+                        <a14:foregroundMark x1="59375" y1="4755" x2="59375" y2="4755"/>
+                        <a14:foregroundMark x1="48234" y1="1495" x2="50136" y2="1495"/>
+                        <a14:foregroundMark x1="39538" y1="64810" x2="45788" y2="88723"/>
+                        <a14:foregroundMark x1="45788" y1="88723" x2="58832" y2="92255"/>
+                        <a14:foregroundMark x1="58832" y1="92255" x2="58696" y2="91304"/>
+                        <a14:foregroundMark x1="56114" y1="64946" x2="83152" y2="52174"/>
+                        <a14:foregroundMark x1="83152" y1="52174" x2="84103" y2="48641"/>
+                        <a14:foregroundMark x1="83016" y1="28668" x2="94429" y2="44022"/>
+                        <a14:foregroundMark x1="94429" y1="44022" x2="94429" y2="44973"/>
+                        <a14:foregroundMark x1="85326" y1="63859" x2="94429" y2="50408"/>
+                        <a14:foregroundMark x1="94429" y1="50408" x2="94565" y2="48505"/>
+                        <a14:foregroundMark x1="54212" y1="53940" x2="43614" y2="53533"/>
+                        <a14:foregroundMark x1="43614" y1="53533" x2="30571" y2="57337"/>
+                        <a14:foregroundMark x1="30571" y1="57337" x2="29484" y2="60190"/>
+                        <a14:foregroundMark x1="32337" y1="94429" x2="47690" y2="96739"/>
+                        <a14:foregroundMark x1="47690" y1="96739" x2="55163" y2="96603"/>
+                        <a14:foregroundMark x1="77038" y1="43207" x2="76902" y2="43750"/>
+                        <a14:foregroundMark x1="97554" y1="39538" x2="98234" y2="53397"/>
+                        <a14:foregroundMark x1="30978" y1="55163" x2="33560" y2="54348"/>
+                        <a14:foregroundMark x1="31386" y1="54484" x2="33152" y2="53668"/>
+                      </a14:backgroundRemoval>
+                    </a14:imgEffect>
+                  </a14:imgLayer>
+                </a14:imgProps>
+              </a:ext>
+              <a:ext uri="{28A0092B-C50C-407E-A947-70E740481C1C}">
+                <a14:useLocalDpi xmlns:a14="http://schemas.microsoft.com/office/drawing/2010/main" val="0"/>
+              </a:ext>
+            </a:extLst>
+          </a:blip>
+          <a:srcRect/>
+          <a:stretch>
+            <a:fillRect/>
+          </a:stretch>
+        </p:blipFill>
+        <p:spPr bwMode="auto">
+          <a:xfrm>
+            <a:off x="6297896" y="1476203"/>
+            <a:ext cx="914400" cy="914400"/>
+          </a:xfrm>
+          <a:prstGeom prst="rect">
+            <a:avLst/>
+          </a:prstGeom>
+          <a:noFill/>
+          <a:extLst>
+            <a:ext uri="{909E8E84-426E-40DD-AFC4-6F175D3DCCD1}">
+              <a14:hiddenFill xmlns:a14="http://schemas.microsoft.com/office/drawing/2010/main">
+                <a:solidFill>
+                  <a:srgbClr val="FFFFFF"/>
+                </a:solidFill>
+              </a14:hiddenFill>
+            </a:ext>
+          </a:extLst>
+        </p:spPr>
+      </p:pic>
+      <p:pic>
+        <p:nvPicPr>
+          <p:cNvPr id="1030" name="Picture 6">
+            <a:extLst>
+              <a:ext uri="{FF2B5EF4-FFF2-40B4-BE49-F238E27FC236}">
+                <a16:creationId xmlns:a16="http://schemas.microsoft.com/office/drawing/2014/main" id="{9E439F67-1ABA-7583-5B40-4E32F922F8F2}"/>
+              </a:ext>
+            </a:extLst>
+          </p:cNvPr>
+          <p:cNvPicPr>
+            <a:picLocks noChangeAspect="1" noChangeArrowheads="1"/>
+          </p:cNvPicPr>
+          <p:nvPr/>
+        </p:nvPicPr>
+        <p:blipFill rotWithShape="1">
+          <a:blip r:embed="rId9">
+            <a:extLst>
+              <a:ext uri="{BEBA8EAE-BF5A-486C-A8C5-ECC9F3942E4B}">
+                <a14:imgProps xmlns:a14="http://schemas.microsoft.com/office/drawing/2010/main">
+                  <a14:imgLayer r:embed="rId10">
+                    <a14:imgEffect>
+                      <a14:backgroundRemoval t="2333" b="90000" l="4701" r="95299">
+                        <a14:foregroundMark x1="14530" y1="11333" x2="16239" y2="38000"/>
+                        <a14:foregroundMark x1="5128" y1="19333" x2="11538" y2="29667"/>
+                        <a14:foregroundMark x1="21795" y1="14000" x2="36325" y2="57667"/>
+                        <a14:foregroundMark x1="36325" y1="57667" x2="36325" y2="57667"/>
+                        <a14:foregroundMark x1="14957" y1="38000" x2="57692" y2="62000"/>
+                        <a14:foregroundMark x1="57692" y1="62000" x2="66667" y2="65667"/>
+                        <a14:foregroundMark x1="93162" y1="64667" x2="95726" y2="64000"/>
+                        <a14:foregroundMark x1="12393" y1="2333" x2="14957" y2="9333"/>
+                        <a14:foregroundMark x1="21795" y1="9000" x2="23077" y2="13333"/>
+                        <a14:foregroundMark x1="18376" y1="10000" x2="20085" y2="18000"/>
+                        <a14:foregroundMark x1="13248" y1="43000" x2="30769" y2="56667"/>
+                        <a14:foregroundMark x1="29915" y1="58667" x2="24359" y2="55667"/>
+                        <a14:foregroundMark x1="41880" y1="64667" x2="41880" y2="64667"/>
+                        <a14:foregroundMark x1="59402" y1="67667" x2="59402" y2="67667"/>
+                      </a14:backgroundRemoval>
+                    </a14:imgEffect>
+                  </a14:imgLayer>
+                </a14:imgProps>
+              </a:ext>
+              <a:ext uri="{28A0092B-C50C-407E-A947-70E740481C1C}">
+                <a14:useLocalDpi xmlns:a14="http://schemas.microsoft.com/office/drawing/2010/main" val="0"/>
+              </a:ext>
+            </a:extLst>
+          </a:blip>
+          <a:srcRect l="-1150" t="-2442" r="1150" b="24842"/>
+          <a:stretch/>
+        </p:blipFill>
+        <p:spPr bwMode="auto">
+          <a:xfrm>
+            <a:off x="5224772" y="1476203"/>
+            <a:ext cx="887296" cy="882746"/>
+          </a:xfrm>
+          <a:prstGeom prst="rect">
+            <a:avLst/>
+          </a:prstGeom>
+          <a:noFill/>
+          <a:extLst>
+            <a:ext uri="{909E8E84-426E-40DD-AFC4-6F175D3DCCD1}">
+              <a14:hiddenFill xmlns:a14="http://schemas.microsoft.com/office/drawing/2010/main">
+                <a:solidFill>
+                  <a:srgbClr val="FFFFFF"/>
+                </a:solidFill>
+              </a14:hiddenFill>
+            </a:ext>
+          </a:extLst>
+        </p:spPr>
+      </p:pic>
+      <p:pic>
+        <p:nvPicPr>
+          <p:cNvPr id="1032" name="Picture 8" descr="Picture background">
+            <a:extLst>
+              <a:ext uri="{FF2B5EF4-FFF2-40B4-BE49-F238E27FC236}">
+                <a16:creationId xmlns:a16="http://schemas.microsoft.com/office/drawing/2014/main" id="{72E4294E-EBB3-0735-B74E-C253D62664A7}"/>
+              </a:ext>
+            </a:extLst>
+          </p:cNvPr>
+          <p:cNvPicPr>
+            <a:picLocks noChangeAspect="1" noChangeArrowheads="1"/>
+          </p:cNvPicPr>
+          <p:nvPr/>
+        </p:nvPicPr>
+        <p:blipFill>
+          <a:blip r:embed="rId11">
+            <a:extLst>
+              <a:ext uri="{28A0092B-C50C-407E-A947-70E740481C1C}">
+                <a14:useLocalDpi xmlns:a14="http://schemas.microsoft.com/office/drawing/2010/main" val="0"/>
+              </a:ext>
+            </a:extLst>
+          </a:blip>
+          <a:srcRect/>
+          <a:stretch>
+            <a:fillRect/>
+          </a:stretch>
+        </p:blipFill>
+        <p:spPr bwMode="auto">
+          <a:xfrm>
+            <a:off x="5572561" y="2681544"/>
+            <a:ext cx="914401" cy="914401"/>
+          </a:xfrm>
+          <a:prstGeom prst="rect">
+            <a:avLst/>
+          </a:prstGeom>
+          <a:noFill/>
+          <a:extLst>
+            <a:ext uri="{909E8E84-426E-40DD-AFC4-6F175D3DCCD1}">
+              <a14:hiddenFill xmlns:a14="http://schemas.microsoft.com/office/drawing/2010/main">
+                <a:solidFill>
+                  <a:srgbClr val="FFFFFF"/>
+                </a:solidFill>
+              </a14:hiddenFill>
+            </a:ext>
+          </a:extLst>
+        </p:spPr>
+      </p:pic>
+      <p:pic>
+        <p:nvPicPr>
+          <p:cNvPr id="1036" name="Picture 12">
+            <a:extLst>
+              <a:ext uri="{FF2B5EF4-FFF2-40B4-BE49-F238E27FC236}">
+                <a16:creationId xmlns:a16="http://schemas.microsoft.com/office/drawing/2014/main" id="{951F66B9-22A5-E74C-09D9-E59592AA61CC}"/>
+              </a:ext>
+            </a:extLst>
+          </p:cNvPr>
+          <p:cNvPicPr>
+            <a:picLocks noChangeAspect="1" noChangeArrowheads="1"/>
+          </p:cNvPicPr>
+          <p:nvPr/>
+        </p:nvPicPr>
+        <p:blipFill rotWithShape="1">
+          <a:blip r:embed="rId12">
+            <a:extLst>
+              <a:ext uri="{BEBA8EAE-BF5A-486C-A8C5-ECC9F3942E4B}">
+                <a14:imgProps xmlns:a14="http://schemas.microsoft.com/office/drawing/2010/main">
+                  <a14:imgLayer r:embed="rId13">
+                    <a14:imgEffect>
+                      <a14:backgroundRemoval t="9918" b="89946" l="8832" r="89946">
+                        <a14:foregroundMark x1="8832" y1="42391" x2="8967" y2="44701"/>
+                        <a14:foregroundMark x1="34783" y1="34918" x2="28261" y2="43071"/>
+                        <a14:backgroundMark x1="36821" y1="35734" x2="36821" y2="35734"/>
+                        <a14:backgroundMark x1="32201" y1="50815" x2="32201" y2="50815"/>
+                      </a14:backgroundRemoval>
+                    </a14:imgEffect>
+                  </a14:imgLayer>
+                </a14:imgProps>
+              </a:ext>
+              <a:ext uri="{28A0092B-C50C-407E-A947-70E740481C1C}">
+                <a14:useLocalDpi xmlns:a14="http://schemas.microsoft.com/office/drawing/2010/main" val="0"/>
+              </a:ext>
+            </a:extLst>
+          </a:blip>
+          <a:srcRect t="26370" r="54590" b="32611"/>
+          <a:stretch/>
+        </p:blipFill>
+        <p:spPr bwMode="auto">
+          <a:xfrm>
+            <a:off x="6844007" y="2615351"/>
+            <a:ext cx="1118894" cy="1010680"/>
+          </a:xfrm>
+          <a:prstGeom prst="rect">
+            <a:avLst/>
+          </a:prstGeom>
+          <a:noFill/>
+          <a:extLst>
+            <a:ext uri="{909E8E84-426E-40DD-AFC4-6F175D3DCCD1}">
+              <a14:hiddenFill xmlns:a14="http://schemas.microsoft.com/office/drawing/2010/main">
+                <a:solidFill>
+                  <a:srgbClr val="FFFFFF"/>
+                </a:solidFill>
+              </a14:hiddenFill>
+            </a:ext>
+          </a:extLst>
+        </p:spPr>
+      </p:pic>
+      <p:sp>
+        <p:nvSpPr>
+          <p:cNvPr id="6" name="Подзаголовок 18">
+            <a:extLst>
+              <a:ext uri="{FF2B5EF4-FFF2-40B4-BE49-F238E27FC236}">
+                <a16:creationId xmlns:a16="http://schemas.microsoft.com/office/drawing/2014/main" id="{FB7B273E-1745-E932-0072-C780D6715772}"/>
+              </a:ext>
+            </a:extLst>
+          </p:cNvPr>
+          <p:cNvSpPr txBox="1">
+            <a:spLocks/>
+          </p:cNvSpPr>
+          <p:nvPr/>
+        </p:nvSpPr>
+        <p:spPr>
+          <a:xfrm>
+            <a:off x="4783397" y="1073214"/>
+            <a:ext cx="1272195" cy="451384"/>
+          </a:xfrm>
+          <a:prstGeom prst="rect">
+            <a:avLst/>
+          </a:prstGeom>
+          <a:noFill/>
+          <a:ln>
+            <a:noFill/>
+          </a:ln>
+        </p:spPr>
+        <p:txBody>
+          <a:bodyPr spcFirstLastPara="1" wrap="square" lIns="91425" tIns="91425" rIns="91425" bIns="91425" anchor="ctr" anchorCtr="0">
+            <a:noAutofit/>
+          </a:bodyPr>
+          <a:lstStyle>
+            <a:defPPr marR="0" lvl="0" algn="l" rtl="0">
+              <a:lnSpc>
+                <a:spcPct val="100000"/>
+              </a:lnSpc>
+              <a:spcBef>
+                <a:spcPts val="0"/>
+              </a:spcBef>
+              <a:spcAft>
+                <a:spcPts val="0"/>
+              </a:spcAft>
+            </a:defPPr>
+            <a:lvl1pPr marL="457200" marR="0" lvl="0" indent="-317500" algn="r" rtl="0">
+              <a:lnSpc>
+                <a:spcPct val="100000"/>
+              </a:lnSpc>
+              <a:spcBef>
+                <a:spcPts val="0"/>
+              </a:spcBef>
+              <a:spcAft>
+                <a:spcPts val="0"/>
+              </a:spcAft>
+              <a:buClr>
+                <a:schemeClr val="accent2"/>
+              </a:buClr>
+              <a:buSzPts val="1800"/>
+              <a:buFont typeface="Roboto"/>
+              <a:buNone/>
+              <a:defRPr sz="1800" b="0" i="0" u="none" strike="noStrike" cap="none">
+                <a:solidFill>
+                  <a:schemeClr val="accent2"/>
+                </a:solidFill>
+                <a:latin typeface="Roboto"/>
+                <a:ea typeface="Roboto"/>
+                <a:cs typeface="Roboto"/>
+                <a:sym typeface="Roboto"/>
+              </a:defRPr>
+            </a:lvl1pPr>
+            <a:lvl2pPr marL="914400" marR="0" lvl="1" indent="-317500" algn="r" rtl="0">
+              <a:lnSpc>
+                <a:spcPct val="100000"/>
+              </a:lnSpc>
+              <a:spcBef>
+                <a:spcPts val="0"/>
+              </a:spcBef>
+              <a:spcAft>
+                <a:spcPts val="0"/>
+              </a:spcAft>
+              <a:buClr>
+                <a:srgbClr val="000000"/>
+              </a:buClr>
+              <a:buSzPts val="2800"/>
+              <a:buFont typeface="Roboto"/>
+              <a:buNone/>
+              <a:defRPr sz="2800" b="0" i="0" u="none" strike="noStrike" cap="none">
+                <a:solidFill>
+                  <a:srgbClr val="000000"/>
+                </a:solidFill>
+                <a:latin typeface="Roboto"/>
+                <a:ea typeface="Roboto"/>
+                <a:cs typeface="Roboto"/>
+                <a:sym typeface="Roboto"/>
+              </a:defRPr>
+            </a:lvl2pPr>
+            <a:lvl3pPr marL="1371600" marR="0" lvl="2" indent="-317500" algn="r" rtl="0">
+              <a:lnSpc>
+                <a:spcPct val="100000"/>
+              </a:lnSpc>
+              <a:spcBef>
+                <a:spcPts val="0"/>
+              </a:spcBef>
+              <a:spcAft>
+                <a:spcPts val="0"/>
+              </a:spcAft>
+              <a:buClr>
+                <a:srgbClr val="000000"/>
+              </a:buClr>
+              <a:buSzPts val="2800"/>
+              <a:buFont typeface="Roboto"/>
+              <a:buNone/>
+              <a:defRPr sz="2800" b="0" i="0" u="none" strike="noStrike" cap="none">
+                <a:solidFill>
+                  <a:srgbClr val="000000"/>
+                </a:solidFill>
+                <a:latin typeface="Roboto"/>
+                <a:ea typeface="Roboto"/>
+                <a:cs typeface="Roboto"/>
+                <a:sym typeface="Roboto"/>
+              </a:defRPr>
+            </a:lvl3pPr>
+            <a:lvl4pPr marL="1828800" marR="0" lvl="3" indent="-317500" algn="r" rtl="0">
+              <a:lnSpc>
+                <a:spcPct val="100000"/>
+              </a:lnSpc>
+              <a:spcBef>
+                <a:spcPts val="0"/>
+              </a:spcBef>
+              <a:spcAft>
+                <a:spcPts val="0"/>
+              </a:spcAft>
+              <a:buClr>
+                <a:srgbClr val="000000"/>
+              </a:buClr>
+              <a:buSzPts val="2800"/>
+              <a:buFont typeface="Roboto"/>
+              <a:buNone/>
+              <a:defRPr sz="2800" b="0" i="0" u="none" strike="noStrike" cap="none">
+                <a:solidFill>
+                  <a:srgbClr val="000000"/>
+                </a:solidFill>
+                <a:latin typeface="Roboto"/>
+                <a:ea typeface="Roboto"/>
+                <a:cs typeface="Roboto"/>
+                <a:sym typeface="Roboto"/>
+              </a:defRPr>
+            </a:lvl4pPr>
+            <a:lvl5pPr marL="2286000" marR="0" lvl="4" indent="-317500" algn="r" rtl="0">
+              <a:lnSpc>
+                <a:spcPct val="100000"/>
+              </a:lnSpc>
+              <a:spcBef>
+                <a:spcPts val="0"/>
+              </a:spcBef>
+              <a:spcAft>
+                <a:spcPts val="0"/>
+              </a:spcAft>
+              <a:buClr>
+                <a:srgbClr val="000000"/>
+              </a:buClr>
+              <a:buSzPts val="2800"/>
+              <a:buFont typeface="Roboto"/>
+              <a:buNone/>
+              <a:defRPr sz="2800" b="0" i="0" u="none" strike="noStrike" cap="none">
+                <a:solidFill>
+                  <a:srgbClr val="000000"/>
+                </a:solidFill>
+                <a:latin typeface="Roboto"/>
+                <a:ea typeface="Roboto"/>
+                <a:cs typeface="Roboto"/>
+                <a:sym typeface="Roboto"/>
+              </a:defRPr>
+            </a:lvl5pPr>
+            <a:lvl6pPr marL="2743200" marR="0" lvl="5" indent="-317500" algn="r" rtl="0">
+              <a:lnSpc>
+                <a:spcPct val="100000"/>
+              </a:lnSpc>
+              <a:spcBef>
+                <a:spcPts val="0"/>
+              </a:spcBef>
+              <a:spcAft>
+                <a:spcPts val="0"/>
+              </a:spcAft>
+              <a:buClr>
+                <a:srgbClr val="000000"/>
+              </a:buClr>
+              <a:buSzPts val="2800"/>
+              <a:buFont typeface="Roboto"/>
+              <a:buNone/>
+              <a:defRPr sz="2800" b="0" i="0" u="none" strike="noStrike" cap="none">
+                <a:solidFill>
+                  <a:srgbClr val="000000"/>
+                </a:solidFill>
+                <a:latin typeface="Roboto"/>
+                <a:ea typeface="Roboto"/>
+                <a:cs typeface="Roboto"/>
+                <a:sym typeface="Roboto"/>
+              </a:defRPr>
+            </a:lvl6pPr>
+            <a:lvl7pPr marL="3200400" marR="0" lvl="6" indent="-317500" algn="r" rtl="0">
+              <a:lnSpc>
+                <a:spcPct val="100000"/>
+              </a:lnSpc>
+              <a:spcBef>
+                <a:spcPts val="0"/>
+              </a:spcBef>
+              <a:spcAft>
+                <a:spcPts val="0"/>
+              </a:spcAft>
+              <a:buClr>
+                <a:srgbClr val="000000"/>
+              </a:buClr>
+              <a:buSzPts val="2800"/>
+              <a:buFont typeface="Roboto"/>
+              <a:buNone/>
+              <a:defRPr sz="2800" b="0" i="0" u="none" strike="noStrike" cap="none">
+                <a:solidFill>
+                  <a:srgbClr val="000000"/>
+                </a:solidFill>
+                <a:latin typeface="Roboto"/>
+                <a:ea typeface="Roboto"/>
+                <a:cs typeface="Roboto"/>
+                <a:sym typeface="Roboto"/>
+              </a:defRPr>
+            </a:lvl7pPr>
+            <a:lvl8pPr marL="3657600" marR="0" lvl="7" indent="-317500" algn="r" rtl="0">
+              <a:lnSpc>
+                <a:spcPct val="100000"/>
+              </a:lnSpc>
+              <a:spcBef>
+                <a:spcPts val="0"/>
+              </a:spcBef>
+              <a:spcAft>
+                <a:spcPts val="0"/>
+              </a:spcAft>
+              <a:buClr>
+                <a:srgbClr val="000000"/>
+              </a:buClr>
+              <a:buSzPts val="2800"/>
+              <a:buFont typeface="Roboto"/>
+              <a:buNone/>
+              <a:defRPr sz="2800" b="0" i="0" u="none" strike="noStrike" cap="none">
+                <a:solidFill>
+                  <a:srgbClr val="000000"/>
+                </a:solidFill>
+                <a:latin typeface="Roboto"/>
+                <a:ea typeface="Roboto"/>
+                <a:cs typeface="Roboto"/>
+                <a:sym typeface="Roboto"/>
+              </a:defRPr>
+            </a:lvl8pPr>
+            <a:lvl9pPr marL="4114800" marR="0" lvl="8" indent="-317500" algn="r" rtl="0">
+              <a:lnSpc>
+                <a:spcPct val="100000"/>
+              </a:lnSpc>
+              <a:spcBef>
+                <a:spcPts val="0"/>
+              </a:spcBef>
+              <a:spcAft>
+                <a:spcPts val="0"/>
+              </a:spcAft>
+              <a:buClr>
+                <a:srgbClr val="000000"/>
+              </a:buClr>
+              <a:buSzPts val="2800"/>
+              <a:buFont typeface="Roboto"/>
+              <a:buNone/>
+              <a:defRPr sz="2800" b="0" i="0" u="none" strike="noStrike" cap="none">
+                <a:solidFill>
+                  <a:srgbClr val="000000"/>
+                </a:solidFill>
+                <a:latin typeface="Roboto"/>
+                <a:ea typeface="Roboto"/>
+                <a:cs typeface="Roboto"/>
+                <a:sym typeface="Roboto"/>
+              </a:defRPr>
+            </a:lvl9pPr>
+          </a:lstStyle>
+          <a:p>
+            <a:pPr marL="0" indent="0" algn="ctr"/>
+            <a:r>
+              <a:rPr lang="en-US" sz="1100" dirty="0"/>
+              <a:t>Flask</a:t>
+            </a:r>
+            <a:endParaRPr lang="ru-RU" sz="1100" dirty="0"/>
+          </a:p>
+        </p:txBody>
+      </p:sp>
+      <p:sp>
+        <p:nvSpPr>
+          <p:cNvPr id="7" name="Подзаголовок 18">
+            <a:extLst>
+              <a:ext uri="{FF2B5EF4-FFF2-40B4-BE49-F238E27FC236}">
+                <a16:creationId xmlns:a16="http://schemas.microsoft.com/office/drawing/2014/main" id="{D385949D-9E44-5BE9-53D4-89525AB4E3E5}"/>
+              </a:ext>
+            </a:extLst>
+          </p:cNvPr>
+          <p:cNvSpPr txBox="1">
+            <a:spLocks/>
+          </p:cNvSpPr>
+          <p:nvPr/>
+        </p:nvSpPr>
+        <p:spPr>
+          <a:xfrm>
+            <a:off x="6088021" y="1072008"/>
+            <a:ext cx="1272195" cy="451384"/>
+          </a:xfrm>
+          <a:prstGeom prst="rect">
+            <a:avLst/>
+          </a:prstGeom>
+          <a:noFill/>
+          <a:ln>
+            <a:noFill/>
+          </a:ln>
+        </p:spPr>
+        <p:txBody>
+          <a:bodyPr spcFirstLastPara="1" wrap="square" lIns="91425" tIns="91425" rIns="91425" bIns="91425" anchor="ctr" anchorCtr="0">
+            <a:noAutofit/>
+          </a:bodyPr>
+          <a:lstStyle>
+            <a:defPPr marR="0" lvl="0" algn="l" rtl="0">
+              <a:lnSpc>
+                <a:spcPct val="100000"/>
+              </a:lnSpc>
+              <a:spcBef>
+                <a:spcPts val="0"/>
+              </a:spcBef>
+              <a:spcAft>
+                <a:spcPts val="0"/>
+              </a:spcAft>
+            </a:defPPr>
+            <a:lvl1pPr marL="457200" marR="0" lvl="0" indent="-317500" algn="r" rtl="0">
+              <a:lnSpc>
+                <a:spcPct val="100000"/>
+              </a:lnSpc>
+              <a:spcBef>
+                <a:spcPts val="0"/>
+              </a:spcBef>
+              <a:spcAft>
+                <a:spcPts val="0"/>
+              </a:spcAft>
+              <a:buClr>
+                <a:schemeClr val="accent2"/>
+              </a:buClr>
+              <a:buSzPts val="1800"/>
+              <a:buFont typeface="Roboto"/>
+              <a:buNone/>
+              <a:defRPr sz="1800" b="0" i="0" u="none" strike="noStrike" cap="none">
+                <a:solidFill>
+                  <a:schemeClr val="accent2"/>
+                </a:solidFill>
+                <a:latin typeface="Roboto"/>
+                <a:ea typeface="Roboto"/>
+                <a:cs typeface="Roboto"/>
+                <a:sym typeface="Roboto"/>
+              </a:defRPr>
+            </a:lvl1pPr>
+            <a:lvl2pPr marL="914400" marR="0" lvl="1" indent="-317500" algn="r" rtl="0">
+              <a:lnSpc>
+                <a:spcPct val="100000"/>
+              </a:lnSpc>
+              <a:spcBef>
+                <a:spcPts val="0"/>
+              </a:spcBef>
+              <a:spcAft>
+                <a:spcPts val="0"/>
+              </a:spcAft>
+              <a:buClr>
+                <a:srgbClr val="000000"/>
+              </a:buClr>
+              <a:buSzPts val="2800"/>
+              <a:buFont typeface="Roboto"/>
+              <a:buNone/>
+              <a:defRPr sz="2800" b="0" i="0" u="none" strike="noStrike" cap="none">
+                <a:solidFill>
+                  <a:srgbClr val="000000"/>
+                </a:solidFill>
+                <a:latin typeface="Roboto"/>
+                <a:ea typeface="Roboto"/>
+                <a:cs typeface="Roboto"/>
+                <a:sym typeface="Roboto"/>
+              </a:defRPr>
+            </a:lvl2pPr>
+            <a:lvl3pPr marL="1371600" marR="0" lvl="2" indent="-317500" algn="r" rtl="0">
+              <a:lnSpc>
+                <a:spcPct val="100000"/>
+              </a:lnSpc>
+              <a:spcBef>
+                <a:spcPts val="0"/>
+              </a:spcBef>
+              <a:spcAft>
+                <a:spcPts val="0"/>
+              </a:spcAft>
+              <a:buClr>
+                <a:srgbClr val="000000"/>
+              </a:buClr>
+              <a:buSzPts val="2800"/>
+              <a:buFont typeface="Roboto"/>
+              <a:buNone/>
+              <a:defRPr sz="2800" b="0" i="0" u="none" strike="noStrike" cap="none">
+                <a:solidFill>
+                  <a:srgbClr val="000000"/>
+                </a:solidFill>
+                <a:latin typeface="Roboto"/>
+                <a:ea typeface="Roboto"/>
+                <a:cs typeface="Roboto"/>
+                <a:sym typeface="Roboto"/>
+              </a:defRPr>
+            </a:lvl3pPr>
+            <a:lvl4pPr marL="1828800" marR="0" lvl="3" indent="-317500" algn="r" rtl="0">
+              <a:lnSpc>
+                <a:spcPct val="100000"/>
+              </a:lnSpc>
+              <a:spcBef>
+                <a:spcPts val="0"/>
+              </a:spcBef>
+              <a:spcAft>
+                <a:spcPts val="0"/>
+              </a:spcAft>
+              <a:buClr>
+                <a:srgbClr val="000000"/>
+              </a:buClr>
+              <a:buSzPts val="2800"/>
+              <a:buFont typeface="Roboto"/>
+              <a:buNone/>
+              <a:defRPr sz="2800" b="0" i="0" u="none" strike="noStrike" cap="none">
+                <a:solidFill>
+                  <a:srgbClr val="000000"/>
+                </a:solidFill>
+                <a:latin typeface="Roboto"/>
+                <a:ea typeface="Roboto"/>
+                <a:cs typeface="Roboto"/>
+                <a:sym typeface="Roboto"/>
+              </a:defRPr>
+            </a:lvl4pPr>
+            <a:lvl5pPr marL="2286000" marR="0" lvl="4" indent="-317500" algn="r" rtl="0">
+              <a:lnSpc>
+                <a:spcPct val="100000"/>
+              </a:lnSpc>
+              <a:spcBef>
+                <a:spcPts val="0"/>
+              </a:spcBef>
+              <a:spcAft>
+                <a:spcPts val="0"/>
+              </a:spcAft>
+              <a:buClr>
+                <a:srgbClr val="000000"/>
+              </a:buClr>
+              <a:buSzPts val="2800"/>
+              <a:buFont typeface="Roboto"/>
+              <a:buNone/>
+              <a:defRPr sz="2800" b="0" i="0" u="none" strike="noStrike" cap="none">
+                <a:solidFill>
+                  <a:srgbClr val="000000"/>
+                </a:solidFill>
+                <a:latin typeface="Roboto"/>
+                <a:ea typeface="Roboto"/>
+                <a:cs typeface="Roboto"/>
+                <a:sym typeface="Roboto"/>
+              </a:defRPr>
+            </a:lvl5pPr>
+            <a:lvl6pPr marL="2743200" marR="0" lvl="5" indent="-317500" algn="r" rtl="0">
+              <a:lnSpc>
+                <a:spcPct val="100000"/>
+              </a:lnSpc>
+              <a:spcBef>
+                <a:spcPts val="0"/>
+              </a:spcBef>
+              <a:spcAft>
+                <a:spcPts val="0"/>
+              </a:spcAft>
+              <a:buClr>
+                <a:srgbClr val="000000"/>
+              </a:buClr>
+              <a:buSzPts val="2800"/>
+              <a:buFont typeface="Roboto"/>
+              <a:buNone/>
+              <a:defRPr sz="2800" b="0" i="0" u="none" strike="noStrike" cap="none">
+                <a:solidFill>
+                  <a:srgbClr val="000000"/>
+                </a:solidFill>
+                <a:latin typeface="Roboto"/>
+                <a:ea typeface="Roboto"/>
+                <a:cs typeface="Roboto"/>
+                <a:sym typeface="Roboto"/>
+              </a:defRPr>
+            </a:lvl6pPr>
+            <a:lvl7pPr marL="3200400" marR="0" lvl="6" indent="-317500" algn="r" rtl="0">
+              <a:lnSpc>
+                <a:spcPct val="100000"/>
+              </a:lnSpc>
+              <a:spcBef>
+                <a:spcPts val="0"/>
+              </a:spcBef>
+              <a:spcAft>
+                <a:spcPts val="0"/>
+              </a:spcAft>
+              <a:buClr>
+                <a:srgbClr val="000000"/>
+              </a:buClr>
+              <a:buSzPts val="2800"/>
+              <a:buFont typeface="Roboto"/>
+              <a:buNone/>
+              <a:defRPr sz="2800" b="0" i="0" u="none" strike="noStrike" cap="none">
+                <a:solidFill>
+                  <a:srgbClr val="000000"/>
+                </a:solidFill>
+                <a:latin typeface="Roboto"/>
+                <a:ea typeface="Roboto"/>
+                <a:cs typeface="Roboto"/>
+                <a:sym typeface="Roboto"/>
+              </a:defRPr>
+            </a:lvl7pPr>
+            <a:lvl8pPr marL="3657600" marR="0" lvl="7" indent="-317500" algn="r" rtl="0">
+              <a:lnSpc>
+                <a:spcPct val="100000"/>
+              </a:lnSpc>
+              <a:spcBef>
+                <a:spcPts val="0"/>
+              </a:spcBef>
+              <a:spcAft>
+                <a:spcPts val="0"/>
+              </a:spcAft>
+              <a:buClr>
+                <a:srgbClr val="000000"/>
+              </a:buClr>
+              <a:buSzPts val="2800"/>
+              <a:buFont typeface="Roboto"/>
+              <a:buNone/>
+              <a:defRPr sz="2800" b="0" i="0" u="none" strike="noStrike" cap="none">
+                <a:solidFill>
+                  <a:srgbClr val="000000"/>
+                </a:solidFill>
+                <a:latin typeface="Roboto"/>
+                <a:ea typeface="Roboto"/>
+                <a:cs typeface="Roboto"/>
+                <a:sym typeface="Roboto"/>
+              </a:defRPr>
+            </a:lvl8pPr>
+            <a:lvl9pPr marL="4114800" marR="0" lvl="8" indent="-317500" algn="r" rtl="0">
+              <a:lnSpc>
+                <a:spcPct val="100000"/>
+              </a:lnSpc>
+              <a:spcBef>
+                <a:spcPts val="0"/>
+              </a:spcBef>
+              <a:spcAft>
+                <a:spcPts val="0"/>
+              </a:spcAft>
+              <a:buClr>
+                <a:srgbClr val="000000"/>
+              </a:buClr>
+              <a:buSzPts val="2800"/>
+              <a:buFont typeface="Roboto"/>
+              <a:buNone/>
+              <a:defRPr sz="2800" b="0" i="0" u="none" strike="noStrike" cap="none">
+                <a:solidFill>
+                  <a:srgbClr val="000000"/>
+                </a:solidFill>
+                <a:latin typeface="Roboto"/>
+                <a:ea typeface="Roboto"/>
+                <a:cs typeface="Roboto"/>
+                <a:sym typeface="Roboto"/>
+              </a:defRPr>
+            </a:lvl9pPr>
+          </a:lstStyle>
+          <a:p>
+            <a:pPr marL="0" indent="0" algn="ctr"/>
+            <a:r>
+              <a:rPr lang="en-US" sz="1100" dirty="0"/>
+              <a:t>Python</a:t>
+            </a:r>
+            <a:endParaRPr lang="ru-RU" sz="1100" dirty="0"/>
+          </a:p>
+        </p:txBody>
+      </p:sp>
+      <p:sp>
+        <p:nvSpPr>
+          <p:cNvPr id="8" name="Подзаголовок 18">
+            <a:extLst>
+              <a:ext uri="{FF2B5EF4-FFF2-40B4-BE49-F238E27FC236}">
+                <a16:creationId xmlns:a16="http://schemas.microsoft.com/office/drawing/2014/main" id="{311C8D8C-3CE9-5A38-EE12-AB292ADA432C}"/>
+              </a:ext>
+            </a:extLst>
+          </p:cNvPr>
+          <p:cNvSpPr txBox="1">
+            <a:spLocks/>
+          </p:cNvSpPr>
+          <p:nvPr/>
+        </p:nvSpPr>
+        <p:spPr>
+          <a:xfrm>
+            <a:off x="5345952" y="3595945"/>
+            <a:ext cx="1272195" cy="451384"/>
+          </a:xfrm>
+          <a:prstGeom prst="rect">
+            <a:avLst/>
+          </a:prstGeom>
+          <a:noFill/>
+          <a:ln>
+            <a:noFill/>
+          </a:ln>
+        </p:spPr>
+        <p:txBody>
+          <a:bodyPr spcFirstLastPara="1" wrap="square" lIns="91425" tIns="91425" rIns="91425" bIns="91425" anchor="ctr" anchorCtr="0">
+            <a:noAutofit/>
+          </a:bodyPr>
+          <a:lstStyle>
+            <a:defPPr marR="0" lvl="0" algn="l" rtl="0">
+              <a:lnSpc>
+                <a:spcPct val="100000"/>
+              </a:lnSpc>
+              <a:spcBef>
+                <a:spcPts val="0"/>
+              </a:spcBef>
+              <a:spcAft>
+                <a:spcPts val="0"/>
+              </a:spcAft>
+            </a:defPPr>
+            <a:lvl1pPr marL="457200" marR="0" lvl="0" indent="-317500" algn="r" rtl="0">
+              <a:lnSpc>
+                <a:spcPct val="100000"/>
+              </a:lnSpc>
+              <a:spcBef>
+                <a:spcPts val="0"/>
+              </a:spcBef>
+              <a:spcAft>
+                <a:spcPts val="0"/>
+              </a:spcAft>
+              <a:buClr>
+                <a:schemeClr val="accent2"/>
+              </a:buClr>
+              <a:buSzPts val="1800"/>
+              <a:buFont typeface="Roboto"/>
+              <a:buNone/>
+              <a:defRPr sz="1800" b="0" i="0" u="none" strike="noStrike" cap="none">
+                <a:solidFill>
+                  <a:schemeClr val="accent2"/>
+                </a:solidFill>
+                <a:latin typeface="Roboto"/>
+                <a:ea typeface="Roboto"/>
+                <a:cs typeface="Roboto"/>
+                <a:sym typeface="Roboto"/>
+              </a:defRPr>
+            </a:lvl1pPr>
+            <a:lvl2pPr marL="914400" marR="0" lvl="1" indent="-317500" algn="r" rtl="0">
+              <a:lnSpc>
+                <a:spcPct val="100000"/>
+              </a:lnSpc>
+              <a:spcBef>
+                <a:spcPts val="0"/>
+              </a:spcBef>
+              <a:spcAft>
+                <a:spcPts val="0"/>
+              </a:spcAft>
+              <a:buClr>
+                <a:srgbClr val="000000"/>
+              </a:buClr>
+              <a:buSzPts val="2800"/>
+              <a:buFont typeface="Roboto"/>
+              <a:buNone/>
+              <a:defRPr sz="2800" b="0" i="0" u="none" strike="noStrike" cap="none">
+                <a:solidFill>
+                  <a:srgbClr val="000000"/>
+                </a:solidFill>
+                <a:latin typeface="Roboto"/>
+                <a:ea typeface="Roboto"/>
+                <a:cs typeface="Roboto"/>
+                <a:sym typeface="Roboto"/>
+              </a:defRPr>
+            </a:lvl2pPr>
+            <a:lvl3pPr marL="1371600" marR="0" lvl="2" indent="-317500" algn="r" rtl="0">
+              <a:lnSpc>
+                <a:spcPct val="100000"/>
+              </a:lnSpc>
+              <a:spcBef>
+                <a:spcPts val="0"/>
+              </a:spcBef>
+              <a:spcAft>
+                <a:spcPts val="0"/>
+              </a:spcAft>
+              <a:buClr>
+                <a:srgbClr val="000000"/>
+              </a:buClr>
+              <a:buSzPts val="2800"/>
+              <a:buFont typeface="Roboto"/>
+              <a:buNone/>
+              <a:defRPr sz="2800" b="0" i="0" u="none" strike="noStrike" cap="none">
+                <a:solidFill>
+                  <a:srgbClr val="000000"/>
+                </a:solidFill>
+                <a:latin typeface="Roboto"/>
+                <a:ea typeface="Roboto"/>
+                <a:cs typeface="Roboto"/>
+                <a:sym typeface="Roboto"/>
+              </a:defRPr>
+            </a:lvl3pPr>
+            <a:lvl4pPr marL="1828800" marR="0" lvl="3" indent="-317500" algn="r" rtl="0">
+              <a:lnSpc>
+                <a:spcPct val="100000"/>
+              </a:lnSpc>
+              <a:spcBef>
+                <a:spcPts val="0"/>
+              </a:spcBef>
+              <a:spcAft>
+                <a:spcPts val="0"/>
+              </a:spcAft>
+              <a:buClr>
+                <a:srgbClr val="000000"/>
+              </a:buClr>
+              <a:buSzPts val="2800"/>
+              <a:buFont typeface="Roboto"/>
+              <a:buNone/>
+              <a:defRPr sz="2800" b="0" i="0" u="none" strike="noStrike" cap="none">
+                <a:solidFill>
+                  <a:srgbClr val="000000"/>
+                </a:solidFill>
+                <a:latin typeface="Roboto"/>
+                <a:ea typeface="Roboto"/>
+                <a:cs typeface="Roboto"/>
+                <a:sym typeface="Roboto"/>
+              </a:defRPr>
+            </a:lvl4pPr>
+            <a:lvl5pPr marL="2286000" marR="0" lvl="4" indent="-317500" algn="r" rtl="0">
+              <a:lnSpc>
+                <a:spcPct val="100000"/>
+              </a:lnSpc>
+              <a:spcBef>
+                <a:spcPts val="0"/>
+              </a:spcBef>
+              <a:spcAft>
+                <a:spcPts val="0"/>
+              </a:spcAft>
+              <a:buClr>
+                <a:srgbClr val="000000"/>
+              </a:buClr>
+              <a:buSzPts val="2800"/>
+              <a:buFont typeface="Roboto"/>
+              <a:buNone/>
+              <a:defRPr sz="2800" b="0" i="0" u="none" strike="noStrike" cap="none">
+                <a:solidFill>
+                  <a:srgbClr val="000000"/>
+                </a:solidFill>
+                <a:latin typeface="Roboto"/>
+                <a:ea typeface="Roboto"/>
+                <a:cs typeface="Roboto"/>
+                <a:sym typeface="Roboto"/>
+              </a:defRPr>
+            </a:lvl5pPr>
+            <a:lvl6pPr marL="2743200" marR="0" lvl="5" indent="-317500" algn="r" rtl="0">
+              <a:lnSpc>
+                <a:spcPct val="100000"/>
+              </a:lnSpc>
+              <a:spcBef>
+                <a:spcPts val="0"/>
+              </a:spcBef>
+              <a:spcAft>
+                <a:spcPts val="0"/>
+              </a:spcAft>
+              <a:buClr>
+                <a:srgbClr val="000000"/>
+              </a:buClr>
+              <a:buSzPts val="2800"/>
+              <a:buFont typeface="Roboto"/>
+              <a:buNone/>
+              <a:defRPr sz="2800" b="0" i="0" u="none" strike="noStrike" cap="none">
+                <a:solidFill>
+                  <a:srgbClr val="000000"/>
+                </a:solidFill>
+                <a:latin typeface="Roboto"/>
+                <a:ea typeface="Roboto"/>
+                <a:cs typeface="Roboto"/>
+                <a:sym typeface="Roboto"/>
+              </a:defRPr>
+            </a:lvl6pPr>
+            <a:lvl7pPr marL="3200400" marR="0" lvl="6" indent="-317500" algn="r" rtl="0">
+              <a:lnSpc>
+                <a:spcPct val="100000"/>
+              </a:lnSpc>
+              <a:spcBef>
+                <a:spcPts val="0"/>
+              </a:spcBef>
+              <a:spcAft>
+                <a:spcPts val="0"/>
+              </a:spcAft>
+              <a:buClr>
+                <a:srgbClr val="000000"/>
+              </a:buClr>
+              <a:buSzPts val="2800"/>
+              <a:buFont typeface="Roboto"/>
+              <a:buNone/>
+              <a:defRPr sz="2800" b="0" i="0" u="none" strike="noStrike" cap="none">
+                <a:solidFill>
+                  <a:srgbClr val="000000"/>
+                </a:solidFill>
+                <a:latin typeface="Roboto"/>
+                <a:ea typeface="Roboto"/>
+                <a:cs typeface="Roboto"/>
+                <a:sym typeface="Roboto"/>
+              </a:defRPr>
+            </a:lvl7pPr>
+            <a:lvl8pPr marL="3657600" marR="0" lvl="7" indent="-317500" algn="r" rtl="0">
+              <a:lnSpc>
+                <a:spcPct val="100000"/>
+              </a:lnSpc>
+              <a:spcBef>
+                <a:spcPts val="0"/>
+              </a:spcBef>
+              <a:spcAft>
+                <a:spcPts val="0"/>
+              </a:spcAft>
+              <a:buClr>
+                <a:srgbClr val="000000"/>
+              </a:buClr>
+              <a:buSzPts val="2800"/>
+              <a:buFont typeface="Roboto"/>
+              <a:buNone/>
+              <a:defRPr sz="2800" b="0" i="0" u="none" strike="noStrike" cap="none">
+                <a:solidFill>
+                  <a:srgbClr val="000000"/>
+                </a:solidFill>
+                <a:latin typeface="Roboto"/>
+                <a:ea typeface="Roboto"/>
+                <a:cs typeface="Roboto"/>
+                <a:sym typeface="Roboto"/>
+              </a:defRPr>
+            </a:lvl8pPr>
+            <a:lvl9pPr marL="4114800" marR="0" lvl="8" indent="-317500" algn="r" rtl="0">
+              <a:lnSpc>
+                <a:spcPct val="100000"/>
+              </a:lnSpc>
+              <a:spcBef>
+                <a:spcPts val="0"/>
+              </a:spcBef>
+              <a:spcAft>
+                <a:spcPts val="0"/>
+              </a:spcAft>
+              <a:buClr>
+                <a:srgbClr val="000000"/>
+              </a:buClr>
+              <a:buSzPts val="2800"/>
+              <a:buFont typeface="Roboto"/>
+              <a:buNone/>
+              <a:defRPr sz="2800" b="0" i="0" u="none" strike="noStrike" cap="none">
+                <a:solidFill>
+                  <a:srgbClr val="000000"/>
+                </a:solidFill>
+                <a:latin typeface="Roboto"/>
+                <a:ea typeface="Roboto"/>
+                <a:cs typeface="Roboto"/>
+                <a:sym typeface="Roboto"/>
+              </a:defRPr>
+            </a:lvl9pPr>
+          </a:lstStyle>
+          <a:p>
+            <a:pPr marL="0" indent="0" algn="ctr"/>
+            <a:r>
+              <a:rPr lang="en-US" sz="1100" dirty="0"/>
+              <a:t>PyCharm</a:t>
+            </a:r>
+            <a:endParaRPr lang="ru-RU" sz="1100" dirty="0"/>
+          </a:p>
+        </p:txBody>
+      </p:sp>
+      <p:sp>
+        <p:nvSpPr>
+          <p:cNvPr id="9" name="Подзаголовок 18">
+            <a:extLst>
+              <a:ext uri="{FF2B5EF4-FFF2-40B4-BE49-F238E27FC236}">
+                <a16:creationId xmlns:a16="http://schemas.microsoft.com/office/drawing/2014/main" id="{8819CD78-A5B3-69A8-2795-B14F9DFB9817}"/>
+              </a:ext>
+            </a:extLst>
+          </p:cNvPr>
+          <p:cNvSpPr txBox="1">
+            <a:spLocks/>
+          </p:cNvSpPr>
+          <p:nvPr/>
+        </p:nvSpPr>
+        <p:spPr>
+          <a:xfrm>
+            <a:off x="6749333" y="3595945"/>
+            <a:ext cx="1272195" cy="451384"/>
+          </a:xfrm>
+          <a:prstGeom prst="rect">
+            <a:avLst/>
+          </a:prstGeom>
+          <a:noFill/>
+          <a:ln>
+            <a:noFill/>
+          </a:ln>
+        </p:spPr>
+        <p:txBody>
+          <a:bodyPr spcFirstLastPara="1" wrap="square" lIns="91425" tIns="91425" rIns="91425" bIns="91425" anchor="ctr" anchorCtr="0">
+            <a:noAutofit/>
+          </a:bodyPr>
+          <a:lstStyle>
+            <a:defPPr marR="0" lvl="0" algn="l" rtl="0">
+              <a:lnSpc>
+                <a:spcPct val="100000"/>
+              </a:lnSpc>
+              <a:spcBef>
+                <a:spcPts val="0"/>
+              </a:spcBef>
+              <a:spcAft>
+                <a:spcPts val="0"/>
+              </a:spcAft>
+            </a:defPPr>
+            <a:lvl1pPr marL="457200" marR="0" lvl="0" indent="-317500" algn="r" rtl="0">
+              <a:lnSpc>
+                <a:spcPct val="100000"/>
+              </a:lnSpc>
+              <a:spcBef>
+                <a:spcPts val="0"/>
+              </a:spcBef>
+              <a:spcAft>
+                <a:spcPts val="0"/>
+              </a:spcAft>
+              <a:buClr>
+                <a:schemeClr val="accent2"/>
+              </a:buClr>
+              <a:buSzPts val="1800"/>
+              <a:buFont typeface="Roboto"/>
+              <a:buNone/>
+              <a:defRPr sz="1800" b="0" i="0" u="none" strike="noStrike" cap="none">
+                <a:solidFill>
+                  <a:schemeClr val="accent2"/>
+                </a:solidFill>
+                <a:latin typeface="Roboto"/>
+                <a:ea typeface="Roboto"/>
+                <a:cs typeface="Roboto"/>
+                <a:sym typeface="Roboto"/>
+              </a:defRPr>
+            </a:lvl1pPr>
+            <a:lvl2pPr marL="914400" marR="0" lvl="1" indent="-317500" algn="r" rtl="0">
+              <a:lnSpc>
+                <a:spcPct val="100000"/>
+              </a:lnSpc>
+              <a:spcBef>
+                <a:spcPts val="0"/>
+              </a:spcBef>
+              <a:spcAft>
+                <a:spcPts val="0"/>
+              </a:spcAft>
+              <a:buClr>
+                <a:srgbClr val="000000"/>
+              </a:buClr>
+              <a:buSzPts val="2800"/>
+              <a:buFont typeface="Roboto"/>
+              <a:buNone/>
+              <a:defRPr sz="2800" b="0" i="0" u="none" strike="noStrike" cap="none">
+                <a:solidFill>
+                  <a:srgbClr val="000000"/>
+                </a:solidFill>
+                <a:latin typeface="Roboto"/>
+                <a:ea typeface="Roboto"/>
+                <a:cs typeface="Roboto"/>
+                <a:sym typeface="Roboto"/>
+              </a:defRPr>
+            </a:lvl2pPr>
+            <a:lvl3pPr marL="1371600" marR="0" lvl="2" indent="-317500" algn="r" rtl="0">
+              <a:lnSpc>
+                <a:spcPct val="100000"/>
+              </a:lnSpc>
+              <a:spcBef>
+                <a:spcPts val="0"/>
+              </a:spcBef>
+              <a:spcAft>
+                <a:spcPts val="0"/>
+              </a:spcAft>
+              <a:buClr>
+                <a:srgbClr val="000000"/>
+              </a:buClr>
+              <a:buSzPts val="2800"/>
+              <a:buFont typeface="Roboto"/>
+              <a:buNone/>
+              <a:defRPr sz="2800" b="0" i="0" u="none" strike="noStrike" cap="none">
+                <a:solidFill>
+                  <a:srgbClr val="000000"/>
+                </a:solidFill>
+                <a:latin typeface="Roboto"/>
+                <a:ea typeface="Roboto"/>
+                <a:cs typeface="Roboto"/>
+                <a:sym typeface="Roboto"/>
+              </a:defRPr>
+            </a:lvl3pPr>
+            <a:lvl4pPr marL="1828800" marR="0" lvl="3" indent="-317500" algn="r" rtl="0">
+              <a:lnSpc>
+                <a:spcPct val="100000"/>
+              </a:lnSpc>
+              <a:spcBef>
+                <a:spcPts val="0"/>
+              </a:spcBef>
+              <a:spcAft>
+                <a:spcPts val="0"/>
+              </a:spcAft>
+              <a:buClr>
+                <a:srgbClr val="000000"/>
+              </a:buClr>
+              <a:buSzPts val="2800"/>
+              <a:buFont typeface="Roboto"/>
+              <a:buNone/>
+              <a:defRPr sz="2800" b="0" i="0" u="none" strike="noStrike" cap="none">
+                <a:solidFill>
+                  <a:srgbClr val="000000"/>
+                </a:solidFill>
+                <a:latin typeface="Roboto"/>
+                <a:ea typeface="Roboto"/>
+                <a:cs typeface="Roboto"/>
+                <a:sym typeface="Roboto"/>
+              </a:defRPr>
+            </a:lvl4pPr>
+            <a:lvl5pPr marL="2286000" marR="0" lvl="4" indent="-317500" algn="r" rtl="0">
+              <a:lnSpc>
+                <a:spcPct val="100000"/>
+              </a:lnSpc>
+              <a:spcBef>
+                <a:spcPts val="0"/>
+              </a:spcBef>
+              <a:spcAft>
+                <a:spcPts val="0"/>
+              </a:spcAft>
+              <a:buClr>
+                <a:srgbClr val="000000"/>
+              </a:buClr>
+              <a:buSzPts val="2800"/>
+              <a:buFont typeface="Roboto"/>
+              <a:buNone/>
+              <a:defRPr sz="2800" b="0" i="0" u="none" strike="noStrike" cap="none">
+                <a:solidFill>
+                  <a:srgbClr val="000000"/>
+                </a:solidFill>
+                <a:latin typeface="Roboto"/>
+                <a:ea typeface="Roboto"/>
+                <a:cs typeface="Roboto"/>
+                <a:sym typeface="Roboto"/>
+              </a:defRPr>
+            </a:lvl5pPr>
+            <a:lvl6pPr marL="2743200" marR="0" lvl="5" indent="-317500" algn="r" rtl="0">
+              <a:lnSpc>
+                <a:spcPct val="100000"/>
+              </a:lnSpc>
+              <a:spcBef>
+                <a:spcPts val="0"/>
+              </a:spcBef>
+              <a:spcAft>
+                <a:spcPts val="0"/>
+              </a:spcAft>
+              <a:buClr>
+                <a:srgbClr val="000000"/>
+              </a:buClr>
+              <a:buSzPts val="2800"/>
+              <a:buFont typeface="Roboto"/>
+              <a:buNone/>
+              <a:defRPr sz="2800" b="0" i="0" u="none" strike="noStrike" cap="none">
+                <a:solidFill>
+                  <a:srgbClr val="000000"/>
+                </a:solidFill>
+                <a:latin typeface="Roboto"/>
+                <a:ea typeface="Roboto"/>
+                <a:cs typeface="Roboto"/>
+                <a:sym typeface="Roboto"/>
+              </a:defRPr>
+            </a:lvl6pPr>
+            <a:lvl7pPr marL="3200400" marR="0" lvl="6" indent="-317500" algn="r" rtl="0">
+              <a:lnSpc>
+                <a:spcPct val="100000"/>
+              </a:lnSpc>
+              <a:spcBef>
+                <a:spcPts val="0"/>
+              </a:spcBef>
+              <a:spcAft>
+                <a:spcPts val="0"/>
+              </a:spcAft>
+              <a:buClr>
+                <a:srgbClr val="000000"/>
+              </a:buClr>
+              <a:buSzPts val="2800"/>
+              <a:buFont typeface="Roboto"/>
+              <a:buNone/>
+              <a:defRPr sz="2800" b="0" i="0" u="none" strike="noStrike" cap="none">
+                <a:solidFill>
+                  <a:srgbClr val="000000"/>
+                </a:solidFill>
+                <a:latin typeface="Roboto"/>
+                <a:ea typeface="Roboto"/>
+                <a:cs typeface="Roboto"/>
+                <a:sym typeface="Roboto"/>
+              </a:defRPr>
+            </a:lvl7pPr>
+            <a:lvl8pPr marL="3657600" marR="0" lvl="7" indent="-317500" algn="r" rtl="0">
+              <a:lnSpc>
+                <a:spcPct val="100000"/>
+              </a:lnSpc>
+              <a:spcBef>
+                <a:spcPts val="0"/>
+              </a:spcBef>
+              <a:spcAft>
+                <a:spcPts val="0"/>
+              </a:spcAft>
+              <a:buClr>
+                <a:srgbClr val="000000"/>
+              </a:buClr>
+              <a:buSzPts val="2800"/>
+              <a:buFont typeface="Roboto"/>
+              <a:buNone/>
+              <a:defRPr sz="2800" b="0" i="0" u="none" strike="noStrike" cap="none">
+                <a:solidFill>
+                  <a:srgbClr val="000000"/>
+                </a:solidFill>
+                <a:latin typeface="Roboto"/>
+                <a:ea typeface="Roboto"/>
+                <a:cs typeface="Roboto"/>
+                <a:sym typeface="Roboto"/>
+              </a:defRPr>
+            </a:lvl8pPr>
+            <a:lvl9pPr marL="4114800" marR="0" lvl="8" indent="-317500" algn="r" rtl="0">
+              <a:lnSpc>
+                <a:spcPct val="100000"/>
+              </a:lnSpc>
+              <a:spcBef>
+                <a:spcPts val="0"/>
+              </a:spcBef>
+              <a:spcAft>
+                <a:spcPts val="0"/>
+              </a:spcAft>
+              <a:buClr>
+                <a:srgbClr val="000000"/>
+              </a:buClr>
+              <a:buSzPts val="2800"/>
+              <a:buFont typeface="Roboto"/>
+              <a:buNone/>
+              <a:defRPr sz="2800" b="0" i="0" u="none" strike="noStrike" cap="none">
+                <a:solidFill>
+                  <a:srgbClr val="000000"/>
+                </a:solidFill>
+                <a:latin typeface="Roboto"/>
+                <a:ea typeface="Roboto"/>
+                <a:cs typeface="Roboto"/>
+                <a:sym typeface="Roboto"/>
+              </a:defRPr>
+            </a:lvl9pPr>
+          </a:lstStyle>
+          <a:p>
+            <a:pPr marL="0" indent="0" algn="ctr"/>
+            <a:r>
+              <a:rPr lang="en-US" sz="1100" dirty="0"/>
+              <a:t>SQLite</a:t>
+            </a:r>
+            <a:endParaRPr lang="ru-RU" sz="1100" dirty="0"/>
+          </a:p>
+        </p:txBody>
+      </p:sp>
+      <p:pic>
+        <p:nvPicPr>
+          <p:cNvPr id="11" name="Рисунок 10" descr="Изображение выглядит как Графика&#10;&#10;Контент, сгенерированный ИИ, может содержать ошибки.">
+            <a:extLst>
+              <a:ext uri="{FF2B5EF4-FFF2-40B4-BE49-F238E27FC236}">
+                <a16:creationId xmlns:a16="http://schemas.microsoft.com/office/drawing/2014/main" id="{77507783-DF15-758E-F22A-D856C47515E6}"/>
+              </a:ext>
+            </a:extLst>
+          </p:cNvPr>
+          <p:cNvPicPr>
+            <a:picLocks noChangeAspect="1"/>
+          </p:cNvPicPr>
+          <p:nvPr/>
+        </p:nvPicPr>
+        <p:blipFill>
+          <a:blip r:embed="rId14"/>
+          <a:stretch>
+            <a:fillRect/>
+          </a:stretch>
+        </p:blipFill>
+        <p:spPr>
+          <a:xfrm>
+            <a:off x="7480104" y="1363984"/>
+            <a:ext cx="1065555" cy="1065555"/>
+          </a:xfrm>
+          <a:prstGeom prst="rect">
+            <a:avLst/>
+          </a:prstGeom>
+        </p:spPr>
+      </p:pic>
+      <p:sp>
+        <p:nvSpPr>
+          <p:cNvPr id="12" name="Подзаголовок 18">
+            <a:extLst>
+              <a:ext uri="{FF2B5EF4-FFF2-40B4-BE49-F238E27FC236}">
+                <a16:creationId xmlns:a16="http://schemas.microsoft.com/office/drawing/2014/main" id="{BAA03CCE-1C9B-36BC-1211-FB6FF03739AD}"/>
+              </a:ext>
+            </a:extLst>
+          </p:cNvPr>
+          <p:cNvSpPr txBox="1">
+            <a:spLocks/>
+          </p:cNvSpPr>
+          <p:nvPr/>
+        </p:nvSpPr>
+        <p:spPr>
+          <a:xfrm>
+            <a:off x="7326803" y="1072008"/>
+            <a:ext cx="1272195" cy="451384"/>
+          </a:xfrm>
+          <a:prstGeom prst="rect">
+            <a:avLst/>
+          </a:prstGeom>
+          <a:noFill/>
+          <a:ln>
+            <a:noFill/>
+          </a:ln>
+        </p:spPr>
+        <p:txBody>
+          <a:bodyPr spcFirstLastPara="1" wrap="square" lIns="91425" tIns="91425" rIns="91425" bIns="91425" anchor="ctr" anchorCtr="0">
+            <a:noAutofit/>
+          </a:bodyPr>
+          <a:lstStyle>
+            <a:defPPr marR="0" lvl="0" algn="l" rtl="0">
+              <a:lnSpc>
+                <a:spcPct val="100000"/>
+              </a:lnSpc>
+              <a:spcBef>
+                <a:spcPts val="0"/>
+              </a:spcBef>
+              <a:spcAft>
+                <a:spcPts val="0"/>
+              </a:spcAft>
+            </a:defPPr>
+            <a:lvl1pPr marL="457200" marR="0" lvl="0" indent="-317500" algn="r" rtl="0">
+              <a:lnSpc>
+                <a:spcPct val="100000"/>
+              </a:lnSpc>
+              <a:spcBef>
+                <a:spcPts val="0"/>
+              </a:spcBef>
+              <a:spcAft>
+                <a:spcPts val="0"/>
+              </a:spcAft>
+              <a:buClr>
+                <a:schemeClr val="accent2"/>
+              </a:buClr>
+              <a:buSzPts val="1800"/>
+              <a:buFont typeface="Roboto"/>
+              <a:buNone/>
+              <a:defRPr sz="1800" b="0" i="0" u="none" strike="noStrike" cap="none">
+                <a:solidFill>
+                  <a:schemeClr val="accent2"/>
+                </a:solidFill>
+                <a:latin typeface="Roboto"/>
+                <a:ea typeface="Roboto"/>
+                <a:cs typeface="Roboto"/>
+                <a:sym typeface="Roboto"/>
+              </a:defRPr>
+            </a:lvl1pPr>
+            <a:lvl2pPr marL="914400" marR="0" lvl="1" indent="-317500" algn="r" rtl="0">
+              <a:lnSpc>
+                <a:spcPct val="100000"/>
+              </a:lnSpc>
+              <a:spcBef>
+                <a:spcPts val="0"/>
+              </a:spcBef>
+              <a:spcAft>
+                <a:spcPts val="0"/>
+              </a:spcAft>
+              <a:buClr>
+                <a:srgbClr val="000000"/>
+              </a:buClr>
+              <a:buSzPts val="2800"/>
+              <a:buFont typeface="Roboto"/>
+              <a:buNone/>
+              <a:defRPr sz="2800" b="0" i="0" u="none" strike="noStrike" cap="none">
+                <a:solidFill>
+                  <a:srgbClr val="000000"/>
+                </a:solidFill>
+                <a:latin typeface="Roboto"/>
+                <a:ea typeface="Roboto"/>
+                <a:cs typeface="Roboto"/>
+                <a:sym typeface="Roboto"/>
+              </a:defRPr>
+            </a:lvl2pPr>
+            <a:lvl3pPr marL="1371600" marR="0" lvl="2" indent="-317500" algn="r" rtl="0">
+              <a:lnSpc>
+                <a:spcPct val="100000"/>
+              </a:lnSpc>
+              <a:spcBef>
+                <a:spcPts val="0"/>
+              </a:spcBef>
+              <a:spcAft>
+                <a:spcPts val="0"/>
+              </a:spcAft>
+              <a:buClr>
+                <a:srgbClr val="000000"/>
+              </a:buClr>
+              <a:buSzPts val="2800"/>
+              <a:buFont typeface="Roboto"/>
+              <a:buNone/>
+              <a:defRPr sz="2800" b="0" i="0" u="none" strike="noStrike" cap="none">
+                <a:solidFill>
+                  <a:srgbClr val="000000"/>
+                </a:solidFill>
+                <a:latin typeface="Roboto"/>
+                <a:ea typeface="Roboto"/>
+                <a:cs typeface="Roboto"/>
+                <a:sym typeface="Roboto"/>
+              </a:defRPr>
+            </a:lvl3pPr>
+            <a:lvl4pPr marL="1828800" marR="0" lvl="3" indent="-317500" algn="r" rtl="0">
+              <a:lnSpc>
+                <a:spcPct val="100000"/>
+              </a:lnSpc>
+              <a:spcBef>
+                <a:spcPts val="0"/>
+              </a:spcBef>
+              <a:spcAft>
+                <a:spcPts val="0"/>
+              </a:spcAft>
+              <a:buClr>
+                <a:srgbClr val="000000"/>
+              </a:buClr>
+              <a:buSzPts val="2800"/>
+              <a:buFont typeface="Roboto"/>
+              <a:buNone/>
+              <a:defRPr sz="2800" b="0" i="0" u="none" strike="noStrike" cap="none">
+                <a:solidFill>
+                  <a:srgbClr val="000000"/>
+                </a:solidFill>
+                <a:latin typeface="Roboto"/>
+                <a:ea typeface="Roboto"/>
+                <a:cs typeface="Roboto"/>
+                <a:sym typeface="Roboto"/>
+              </a:defRPr>
+            </a:lvl4pPr>
+            <a:lvl5pPr marL="2286000" marR="0" lvl="4" indent="-317500" algn="r" rtl="0">
+              <a:lnSpc>
+                <a:spcPct val="100000"/>
+              </a:lnSpc>
+              <a:spcBef>
+                <a:spcPts val="0"/>
+              </a:spcBef>
+              <a:spcAft>
+                <a:spcPts val="0"/>
+              </a:spcAft>
+              <a:buClr>
+                <a:srgbClr val="000000"/>
+              </a:buClr>
+              <a:buSzPts val="2800"/>
+              <a:buFont typeface="Roboto"/>
+              <a:buNone/>
+              <a:defRPr sz="2800" b="0" i="0" u="none" strike="noStrike" cap="none">
+                <a:solidFill>
+                  <a:srgbClr val="000000"/>
+                </a:solidFill>
+                <a:latin typeface="Roboto"/>
+                <a:ea typeface="Roboto"/>
+                <a:cs typeface="Roboto"/>
+                <a:sym typeface="Roboto"/>
+              </a:defRPr>
+            </a:lvl5pPr>
+            <a:lvl6pPr marL="2743200" marR="0" lvl="5" indent="-317500" algn="r" rtl="0">
+              <a:lnSpc>
+                <a:spcPct val="100000"/>
+              </a:lnSpc>
+              <a:spcBef>
+                <a:spcPts val="0"/>
+              </a:spcBef>
+              <a:spcAft>
+                <a:spcPts val="0"/>
+              </a:spcAft>
+              <a:buClr>
+                <a:srgbClr val="000000"/>
+              </a:buClr>
+              <a:buSzPts val="2800"/>
+              <a:buFont typeface="Roboto"/>
+              <a:buNone/>
+              <a:defRPr sz="2800" b="0" i="0" u="none" strike="noStrike" cap="none">
+                <a:solidFill>
+                  <a:srgbClr val="000000"/>
+                </a:solidFill>
+                <a:latin typeface="Roboto"/>
+                <a:ea typeface="Roboto"/>
+                <a:cs typeface="Roboto"/>
+                <a:sym typeface="Roboto"/>
+              </a:defRPr>
+            </a:lvl6pPr>
+            <a:lvl7pPr marL="3200400" marR="0" lvl="6" indent="-317500" algn="r" rtl="0">
+              <a:lnSpc>
+                <a:spcPct val="100000"/>
+              </a:lnSpc>
+              <a:spcBef>
+                <a:spcPts val="0"/>
+              </a:spcBef>
+              <a:spcAft>
+                <a:spcPts val="0"/>
+              </a:spcAft>
+              <a:buClr>
+                <a:srgbClr val="000000"/>
+              </a:buClr>
+              <a:buSzPts val="2800"/>
+              <a:buFont typeface="Roboto"/>
+              <a:buNone/>
+              <a:defRPr sz="2800" b="0" i="0" u="none" strike="noStrike" cap="none">
+                <a:solidFill>
+                  <a:srgbClr val="000000"/>
+                </a:solidFill>
+                <a:latin typeface="Roboto"/>
+                <a:ea typeface="Roboto"/>
+                <a:cs typeface="Roboto"/>
+                <a:sym typeface="Roboto"/>
+              </a:defRPr>
+            </a:lvl7pPr>
+            <a:lvl8pPr marL="3657600" marR="0" lvl="7" indent="-317500" algn="r" rtl="0">
+              <a:lnSpc>
+                <a:spcPct val="100000"/>
+              </a:lnSpc>
+              <a:spcBef>
+                <a:spcPts val="0"/>
+              </a:spcBef>
+              <a:spcAft>
+                <a:spcPts val="0"/>
+              </a:spcAft>
+              <a:buClr>
+                <a:srgbClr val="000000"/>
+              </a:buClr>
+              <a:buSzPts val="2800"/>
+              <a:buFont typeface="Roboto"/>
+              <a:buNone/>
+              <a:defRPr sz="2800" b="0" i="0" u="none" strike="noStrike" cap="none">
+                <a:solidFill>
+                  <a:srgbClr val="000000"/>
+                </a:solidFill>
+                <a:latin typeface="Roboto"/>
+                <a:ea typeface="Roboto"/>
+                <a:cs typeface="Roboto"/>
+                <a:sym typeface="Roboto"/>
+              </a:defRPr>
+            </a:lvl8pPr>
+            <a:lvl9pPr marL="4114800" marR="0" lvl="8" indent="-317500" algn="r" rtl="0">
+              <a:lnSpc>
+                <a:spcPct val="100000"/>
+              </a:lnSpc>
+              <a:spcBef>
+                <a:spcPts val="0"/>
+              </a:spcBef>
+              <a:spcAft>
+                <a:spcPts val="0"/>
+              </a:spcAft>
+              <a:buClr>
+                <a:srgbClr val="000000"/>
+              </a:buClr>
+              <a:buSzPts val="2800"/>
+              <a:buFont typeface="Roboto"/>
+              <a:buNone/>
+              <a:defRPr sz="2800" b="0" i="0" u="none" strike="noStrike" cap="none">
+                <a:solidFill>
+                  <a:srgbClr val="000000"/>
+                </a:solidFill>
+                <a:latin typeface="Roboto"/>
+                <a:ea typeface="Roboto"/>
+                <a:cs typeface="Roboto"/>
+                <a:sym typeface="Roboto"/>
+              </a:defRPr>
+            </a:lvl9pPr>
+          </a:lstStyle>
+          <a:p>
+            <a:pPr marL="0" indent="0" algn="ctr"/>
+            <a:r>
+              <a:rPr lang="en-US" sz="1100" dirty="0"/>
+              <a:t>Supbase</a:t>
+            </a:r>
+            <a:endParaRPr lang="ru-RU" sz="1100" dirty="0"/>
           </a:p>
         </p:txBody>
       </p:sp>

--- a/Report/E-Book.pptx
+++ b/Report/E-Book.pptx
@@ -35404,7 +35404,35 @@
                 <a:latin typeface="Roboto" panose="02000000000000000000" pitchFamily="2" charset="0"/>
                 <a:ea typeface="Roboto" panose="02000000000000000000" pitchFamily="2" charset="0"/>
               </a:rPr>
-              <a:t> создать личный кабинет с гибкой настройкой статусов («читаю», «прочитано», «в хотелках») и возможностью ведения заметок и оценок.</a:t>
+              <a:t> создать личный кабинет с гибкой настройкой статусов («читаю», «прочитано», «</a:t>
+            </a:r>
+            <a:r>
+              <a:rPr lang="ru-RU" altLang="ru-RU" sz="1600" dirty="0">
+                <a:solidFill>
+                  <a:schemeClr val="accent3">
+                    <a:lumMod val="75000"/>
+                  </a:schemeClr>
+                </a:solidFill>
+                <a:latin typeface="Roboto" panose="02000000000000000000" pitchFamily="2" charset="0"/>
+                <a:ea typeface="Roboto" panose="02000000000000000000" pitchFamily="2" charset="0"/>
+              </a:rPr>
+              <a:t>желаемое</a:t>
+            </a:r>
+            <a:r>
+              <a:rPr kumimoji="0" lang="ru-RU" altLang="ru-RU" sz="1600" b="0" i="0" u="none" strike="noStrike" cap="none" normalizeH="0" baseline="0" dirty="0">
+                <a:ln>
+                  <a:noFill/>
+                </a:ln>
+                <a:solidFill>
+                  <a:schemeClr val="accent3">
+                    <a:lumMod val="75000"/>
+                  </a:schemeClr>
+                </a:solidFill>
+                <a:effectLst/>
+                <a:latin typeface="Roboto" panose="02000000000000000000" pitchFamily="2" charset="0"/>
+                <a:ea typeface="Roboto" panose="02000000000000000000" pitchFamily="2" charset="0"/>
+              </a:rPr>
+              <a:t>») и возможностью ведения заметок и оценок.</a:t>
             </a:r>
           </a:p>
           <a:p>
@@ -35455,7 +35483,35 @@
                 <a:latin typeface="Roboto" panose="02000000000000000000" pitchFamily="2" charset="0"/>
                 <a:ea typeface="Roboto" panose="02000000000000000000" pitchFamily="2" charset="0"/>
               </a:rPr>
-              <a:t> разработать систему отслеживания прогресса чтения, активности пользователей и ведения статистики скачиваний.</a:t>
+              <a:t> разработать систему отслеживания прогресса чтения, активности пользователей</a:t>
+            </a:r>
+            <a:r>
+              <a:rPr lang="ru-RU" altLang="ru-RU" sz="1600" dirty="0">
+                <a:solidFill>
+                  <a:schemeClr val="accent3">
+                    <a:lumMod val="75000"/>
+                  </a:schemeClr>
+                </a:solidFill>
+                <a:latin typeface="Roboto" panose="02000000000000000000" pitchFamily="2" charset="0"/>
+                <a:ea typeface="Roboto" panose="02000000000000000000" pitchFamily="2" charset="0"/>
+              </a:rPr>
+              <a:t> </a:t>
+            </a:r>
+            <a:r>
+              <a:rPr kumimoji="0" lang="ru-RU" altLang="ru-RU" sz="1600" b="0" i="0" u="none" strike="noStrike" cap="none" normalizeH="0" baseline="0" dirty="0">
+                <a:ln>
+                  <a:noFill/>
+                </a:ln>
+                <a:solidFill>
+                  <a:schemeClr val="accent3">
+                    <a:lumMod val="75000"/>
+                  </a:schemeClr>
+                </a:solidFill>
+                <a:effectLst/>
+                <a:latin typeface="Roboto" panose="02000000000000000000" pitchFamily="2" charset="0"/>
+                <a:ea typeface="Roboto" panose="02000000000000000000" pitchFamily="2" charset="0"/>
+              </a:rPr>
+              <a:t>и ведения статистики скачиваний.</a:t>
             </a:r>
           </a:p>
         </p:txBody>

--- a/Report/E-Book.pptx
+++ b/Report/E-Book.pptx
@@ -35973,14 +35973,13 @@
         </p:nvPicPr>
         <p:blipFill>
           <a:blip r:embed="rId2"/>
-          <a:stretch>
-            <a:fillRect/>
-          </a:stretch>
+          <a:srcRect/>
+          <a:stretch/>
         </p:blipFill>
         <p:spPr>
           <a:xfrm>
-            <a:off x="545225" y="903221"/>
-            <a:ext cx="8227488" cy="3644520"/>
+            <a:off x="1215697" y="903221"/>
+            <a:ext cx="6886543" cy="3644520"/>
           </a:xfrm>
           <a:prstGeom prst="rect">
             <a:avLst/>

--- a/Report/E-Book.pptx
+++ b/Report/E-Book.pptx
@@ -28990,16 +28990,30 @@
               <a:buNone/>
             </a:pPr>
             <a:r>
-              <a:rPr lang="ru-RU" sz="5100" dirty="0"/>
+              <a:rPr lang="ru-RU" sz="5100" dirty="0">
+                <a:solidFill>
+                  <a:schemeClr val="accent4">
+                    <a:lumMod val="75000"/>
+                  </a:schemeClr>
+                </a:solidFill>
+              </a:rPr>
               <a:t>Домашняя библиотека </a:t>
             </a:r>
             <a:r>
-              <a:rPr lang="en-US" sz="5100" dirty="0"/>
+              <a:rPr lang="en-US" sz="5100" dirty="0">
+                <a:solidFill>
+                  <a:schemeClr val="accent4">
+                    <a:lumMod val="75000"/>
+                  </a:schemeClr>
+                </a:solidFill>
+              </a:rPr>
               <a:t>E-Book</a:t>
             </a:r>
             <a:endParaRPr sz="5400" dirty="0">
               <a:solidFill>
-                <a:schemeClr val="dk2"/>
+                <a:schemeClr val="accent4">
+                  <a:lumMod val="75000"/>
+                </a:schemeClr>
               </a:solidFill>
             </a:endParaRPr>
           </a:p>
@@ -33071,7 +33085,13 @@
           <a:lstStyle/>
           <a:p>
             <a:r>
-              <a:rPr lang="ru-RU" sz="3200" dirty="0"/>
+              <a:rPr lang="ru-RU" sz="3200" dirty="0">
+                <a:solidFill>
+                  <a:schemeClr val="accent4">
+                    <a:lumMod val="75000"/>
+                  </a:schemeClr>
+                </a:solidFill>
+              </a:rPr>
               <a:t>Тест-план</a:t>
             </a:r>
           </a:p>
@@ -33270,8 +33290,18 @@
               <a:buNone/>
             </a:pPr>
             <a:r>
+              <a:rPr lang="ru-RU" dirty="0">
+                <a:solidFill>
+                  <a:schemeClr val="accent4">
+                    <a:lumMod val="75000"/>
+                  </a:schemeClr>
+                </a:solidFill>
+              </a:rPr>
+              <a:t>Над проектом очень старалась команда</a:t>
+            </a:r>
+            <a:r>
               <a:rPr lang="ru-RU" dirty="0"/>
-              <a:t>Над проектом очень старалась команда:</a:t>
+              <a:t>:</a:t>
             </a:r>
             <a:endParaRPr dirty="0"/>
           </a:p>
@@ -34822,14 +34852,18 @@
             <a:r>
               <a:rPr lang="ru-RU" dirty="0">
                 <a:solidFill>
-                  <a:schemeClr val="dk2"/>
+                  <a:schemeClr val="accent4">
+                    <a:lumMod val="75000"/>
+                  </a:schemeClr>
                 </a:solidFill>
               </a:rPr>
               <a:t>Спасибо за внимание!</a:t>
             </a:r>
             <a:endParaRPr dirty="0">
               <a:solidFill>
-                <a:schemeClr val="dk2"/>
+                <a:schemeClr val="accent4">
+                  <a:lumMod val="75000"/>
+                </a:schemeClr>
               </a:solidFill>
             </a:endParaRPr>
           </a:p>
@@ -34918,7 +34952,13 @@
           <a:p>
             <a:pPr algn="l"/>
             <a:r>
-              <a:rPr lang="ru-RU" sz="3200" dirty="0"/>
+              <a:rPr lang="ru-RU" sz="3200" dirty="0">
+                <a:solidFill>
+                  <a:schemeClr val="accent4">
+                    <a:lumMod val="75000"/>
+                  </a:schemeClr>
+                </a:solidFill>
+              </a:rPr>
               <a:t>Цели проекта</a:t>
             </a:r>
           </a:p>
@@ -35192,9 +35232,8 @@
                   <a:noFill/>
                 </a:ln>
                 <a:solidFill>
-                  <a:schemeClr val="accent3">
-                    <a:lumMod val="60000"/>
-                    <a:lumOff val="40000"/>
+                  <a:schemeClr val="accent4">
+                    <a:lumMod val="75000"/>
                   </a:schemeClr>
                 </a:solidFill>
                 <a:effectLst/>
@@ -35260,9 +35299,8 @@
                   <a:noFill/>
                 </a:ln>
                 <a:solidFill>
-                  <a:schemeClr val="accent3">
-                    <a:lumMod val="60000"/>
-                    <a:lumOff val="40000"/>
+                  <a:schemeClr val="accent4">
+                    <a:lumMod val="75000"/>
                   </a:schemeClr>
                 </a:solidFill>
                 <a:effectLst/>
@@ -35328,9 +35366,8 @@
                   <a:noFill/>
                 </a:ln>
                 <a:solidFill>
-                  <a:schemeClr val="accent3">
-                    <a:lumMod val="60000"/>
-                    <a:lumOff val="40000"/>
+                  <a:schemeClr val="accent4">
+                    <a:lumMod val="75000"/>
                   </a:schemeClr>
                 </a:solidFill>
                 <a:effectLst/>
@@ -35345,7 +35382,7 @@
                   <a:noFill/>
                 </a:ln>
                 <a:solidFill>
-                  <a:schemeClr val="accent3">
+                  <a:schemeClr val="accent4">
                     <a:lumMod val="75000"/>
                   </a:schemeClr>
                 </a:solidFill>
@@ -35353,7 +35390,23 @@
                 <a:latin typeface="Roboto" panose="02000000000000000000" pitchFamily="2" charset="0"/>
                 <a:ea typeface="Roboto" panose="02000000000000000000" pitchFamily="2" charset="0"/>
               </a:rPr>
-              <a:t> внедрить систему фильтрации (по жанрам, авторам, статусам) и поиск по ключевым словам или описанию.</a:t>
+              <a:t> </a:t>
+            </a:r>
+            <a:r>
+              <a:rPr kumimoji="0" lang="ru-RU" altLang="ru-RU" sz="1600" b="0" i="0" u="none" strike="noStrike" cap="none" normalizeH="0" baseline="0" dirty="0">
+                <a:ln>
+                  <a:noFill/>
+                </a:ln>
+                <a:solidFill>
+                  <a:schemeClr val="accent3">
+                    <a:lumMod val="75000"/>
+                  </a:schemeClr>
+                </a:solidFill>
+                <a:effectLst/>
+                <a:latin typeface="Roboto" panose="02000000000000000000" pitchFamily="2" charset="0"/>
+                <a:ea typeface="Roboto" panose="02000000000000000000" pitchFamily="2" charset="0"/>
+              </a:rPr>
+              <a:t>внедрить систему фильтрации (по жанрам, авторам, статусам) и поиск по ключевым словам или описанию.</a:t>
             </a:r>
           </a:p>
           <a:p>
@@ -35379,9 +35432,8 @@
                   <a:noFill/>
                 </a:ln>
                 <a:solidFill>
-                  <a:schemeClr val="accent3">
-                    <a:lumMod val="60000"/>
-                    <a:lumOff val="40000"/>
+                  <a:schemeClr val="accent4">
+                    <a:lumMod val="75000"/>
                   </a:schemeClr>
                 </a:solidFill>
                 <a:effectLst/>
@@ -35396,7 +35448,7 @@
                   <a:noFill/>
                 </a:ln>
                 <a:solidFill>
-                  <a:schemeClr val="accent3">
+                  <a:schemeClr val="accent4">
                     <a:lumMod val="75000"/>
                   </a:schemeClr>
                 </a:solidFill>
@@ -35404,7 +35456,23 @@
                 <a:latin typeface="Roboto" panose="02000000000000000000" pitchFamily="2" charset="0"/>
                 <a:ea typeface="Roboto" panose="02000000000000000000" pitchFamily="2" charset="0"/>
               </a:rPr>
-              <a:t> создать личный кабинет с гибкой настройкой статусов («читаю», «прочитано», «</a:t>
+              <a:t> </a:t>
+            </a:r>
+            <a:r>
+              <a:rPr kumimoji="0" lang="ru-RU" altLang="ru-RU" sz="1600" b="0" i="0" u="none" strike="noStrike" cap="none" normalizeH="0" baseline="0" dirty="0">
+                <a:ln>
+                  <a:noFill/>
+                </a:ln>
+                <a:solidFill>
+                  <a:schemeClr val="accent3">
+                    <a:lumMod val="75000"/>
+                  </a:schemeClr>
+                </a:solidFill>
+                <a:effectLst/>
+                <a:latin typeface="Roboto" panose="02000000000000000000" pitchFamily="2" charset="0"/>
+                <a:ea typeface="Roboto" panose="02000000000000000000" pitchFamily="2" charset="0"/>
+              </a:rPr>
+              <a:t>создать личный кабинет с гибкой настройкой статусов («читаю», «прочитано», «</a:t>
             </a:r>
             <a:r>
               <a:rPr lang="ru-RU" altLang="ru-RU" sz="1600" dirty="0">
@@ -35458,9 +35526,8 @@
                   <a:noFill/>
                 </a:ln>
                 <a:solidFill>
-                  <a:schemeClr val="accent3">
-                    <a:lumMod val="60000"/>
-                    <a:lumOff val="40000"/>
+                  <a:schemeClr val="accent4">
+                    <a:lumMod val="75000"/>
                   </a:schemeClr>
                 </a:solidFill>
                 <a:effectLst/>
@@ -35475,7 +35542,7 @@
                   <a:noFill/>
                 </a:ln>
                 <a:solidFill>
-                  <a:schemeClr val="accent3">
+                  <a:schemeClr val="accent4">
                     <a:lumMod val="75000"/>
                   </a:schemeClr>
                 </a:solidFill>
@@ -35483,7 +35550,23 @@
                 <a:latin typeface="Roboto" panose="02000000000000000000" pitchFamily="2" charset="0"/>
                 <a:ea typeface="Roboto" panose="02000000000000000000" pitchFamily="2" charset="0"/>
               </a:rPr>
-              <a:t> разработать систему отслеживания прогресса чтения, активности пользователей</a:t>
+              <a:t> </a:t>
+            </a:r>
+            <a:r>
+              <a:rPr kumimoji="0" lang="ru-RU" altLang="ru-RU" sz="1600" b="0" i="0" u="none" strike="noStrike" cap="none" normalizeH="0" baseline="0" dirty="0">
+                <a:ln>
+                  <a:noFill/>
+                </a:ln>
+                <a:solidFill>
+                  <a:schemeClr val="accent3">
+                    <a:lumMod val="75000"/>
+                  </a:schemeClr>
+                </a:solidFill>
+                <a:effectLst/>
+                <a:latin typeface="Roboto" panose="02000000000000000000" pitchFamily="2" charset="0"/>
+                <a:ea typeface="Roboto" panose="02000000000000000000" pitchFamily="2" charset="0"/>
+              </a:rPr>
+              <a:t>разработать систему отслеживания прогресса чтения, активности пользователей</a:t>
             </a:r>
             <a:r>
               <a:rPr lang="ru-RU" altLang="ru-RU" sz="1600" dirty="0">
@@ -35574,11 +35657,23 @@
           <a:p>
             <a:pPr algn="l"/>
             <a:r>
-              <a:rPr lang="ru-RU" sz="3200" dirty="0"/>
+              <a:rPr lang="ru-RU" sz="3200" dirty="0">
+                <a:solidFill>
+                  <a:schemeClr val="accent4">
+                    <a:lumMod val="75000"/>
+                  </a:schemeClr>
+                </a:solidFill>
+              </a:rPr>
               <a:t>Диаграмма</a:t>
             </a:r>
             <a:r>
-              <a:rPr lang="ru-RU" dirty="0"/>
+              <a:rPr lang="ru-RU" dirty="0">
+                <a:solidFill>
+                  <a:schemeClr val="accent4">
+                    <a:lumMod val="75000"/>
+                  </a:schemeClr>
+                </a:solidFill>
+              </a:rPr>
               <a:t> Ганта</a:t>
             </a:r>
           </a:p>
@@ -35666,11 +35761,23 @@
           <a:p>
             <a:pPr algn="l"/>
             <a:r>
-              <a:rPr lang="ru-RU" sz="3200" dirty="0"/>
+              <a:rPr lang="ru-RU" sz="3200" dirty="0">
+                <a:solidFill>
+                  <a:schemeClr val="accent4">
+                    <a:lumMod val="75000"/>
+                  </a:schemeClr>
+                </a:solidFill>
+              </a:rPr>
               <a:t>Диаграмма</a:t>
             </a:r>
             <a:r>
-              <a:rPr lang="ru-RU" dirty="0"/>
+              <a:rPr lang="ru-RU" dirty="0">
+                <a:solidFill>
+                  <a:schemeClr val="accent4">
+                    <a:lumMod val="75000"/>
+                  </a:schemeClr>
+                </a:solidFill>
+              </a:rPr>
               <a:t> связей</a:t>
             </a:r>
           </a:p>
@@ -35766,11 +35873,23 @@
           <a:p>
             <a:pPr algn="l"/>
             <a:r>
-              <a:rPr lang="ru-RU" sz="3200" dirty="0"/>
+              <a:rPr lang="ru-RU" sz="3200" dirty="0">
+                <a:solidFill>
+                  <a:schemeClr val="accent4">
+                    <a:lumMod val="75000"/>
+                  </a:schemeClr>
+                </a:solidFill>
+              </a:rPr>
               <a:t>Диаграмма</a:t>
             </a:r>
             <a:r>
-              <a:rPr lang="ru-RU" dirty="0"/>
+              <a:rPr lang="ru-RU" dirty="0">
+                <a:solidFill>
+                  <a:schemeClr val="accent4">
+                    <a:lumMod val="75000"/>
+                  </a:schemeClr>
+                </a:solidFill>
+              </a:rPr>
               <a:t> сценариев использования</a:t>
             </a:r>
           </a:p>
@@ -35858,7 +35977,13 @@
           <a:lstStyle/>
           <a:p>
             <a:r>
-              <a:rPr lang="ru-RU" dirty="0"/>
+              <a:rPr lang="ru-RU" dirty="0">
+                <a:solidFill>
+                  <a:schemeClr val="accent4">
+                    <a:lumMod val="75000"/>
+                  </a:schemeClr>
+                </a:solidFill>
+              </a:rPr>
               <a:t>Интерактивный прототип</a:t>
             </a:r>
           </a:p>
@@ -36142,7 +36267,13 @@
           <a:p>
             <a:pPr algn="ctr"/>
             <a:r>
-              <a:rPr lang="ru-RU" sz="3200" dirty="0"/>
+              <a:rPr lang="ru-RU" sz="3200" dirty="0">
+                <a:solidFill>
+                  <a:schemeClr val="accent4">
+                    <a:lumMod val="75000"/>
+                  </a:schemeClr>
+                </a:solidFill>
+              </a:rPr>
               <a:t>Средства разработки</a:t>
             </a:r>
           </a:p>
